--- a/weeks/2026-10-19/decks/Sabio_PayPal_Holiday_Checkout_10.19.26.pptx
+++ b/weeks/2026-10-19/decks/Sabio_PayPal_Holiday_Checkout_10.19.26.pptx
@@ -1375,6 +1375,220 @@
 </p:sldLayout>
 </file>
 
+<file path=ppt/slideLayouts/slideLayout2.xml><?xml version="1.0" encoding="utf-8"?>
+<p:sldLayout xmlns:a="http://schemas.openxmlformats.org/drawingml/2006/main" xmlns:r="http://schemas.openxmlformats.org/officeDocument/2006/relationships" xmlns:p="http://schemas.openxmlformats.org/presentationml/2006/main" preserve="1">
+  <p:cSld name="SABIO_CONTENT">
+    <p:bg>
+      <p:bgPr>
+        <a:solidFill>
+          <a:srgbClr val="1A1A1A"/>
+        </a:solidFill>
+      </p:bgPr>
+    </p:bg>
+    <p:spTree>
+      <p:nvGrpSpPr>
+        <p:cNvPr id="1" name=""/>
+        <p:cNvGrpSpPr/>
+        <p:nvPr/>
+      </p:nvGrpSpPr>
+      <p:grpSpPr>
+        <a:xfrm>
+          <a:off x="0" y="0"/>
+          <a:ext cx="0" cy="0"/>
+          <a:chOff x="0" y="0"/>
+          <a:chExt cx="0" cy="0"/>
+        </a:xfrm>
+      </p:grpSpPr>
+      <p:pic>
+        <p:nvPicPr>
+          <p:cNvPr id="2" name="Image 0" descr="/home/claude/sabio-deck-builders-/assets/sabio-logo-white-sm.png">    </p:cNvPr>
+          <p:cNvPicPr>
+            <a:picLocks noChangeAspect="1"/>
+          </p:cNvPicPr>
+          <p:nvPr/>
+        </p:nvPicPr>
+        <p:blipFill>
+          <a:blip r:embed="rId1"/>
+          <a:stretch>
+            <a:fillRect/>
+          </a:stretch>
+        </p:blipFill>
+        <p:spPr>
+          <a:xfrm>
+            <a:off x="8028432" y="4805172"/>
+            <a:ext cx="647572" cy="155448"/>
+          </a:xfrm>
+          <a:prstGeom prst="rect">
+            <a:avLst/>
+          </a:prstGeom>
+        </p:spPr>
+      </p:pic>
+      <p:sp>
+        <p:nvSpPr>
+          <p:cNvPr id="3" name="Text 0"/>
+          <p:cNvSpPr/>
+          <p:nvPr/>
+        </p:nvSpPr>
+        <p:spPr>
+          <a:xfrm>
+            <a:off x="868680" y="4832604"/>
+            <a:ext cx="5486400" cy="182880"/>
+          </a:xfrm>
+          <a:prstGeom prst="rect">
+            <a:avLst/>
+          </a:prstGeom>
+          <a:noFill/>
+          <a:ln/>
+        </p:spPr>
+        <p:txBody>
+          <a:bodyPr wrap="square" lIns="0" tIns="0" rIns="0" bIns="0" rtlCol="0" anchor="t"/>
+          <a:lstStyle/>
+          <a:p>
+            <a:pPr indent="0" marL="0">
+              <a:buNone/>
+            </a:pPr>
+            <a:r>
+              <a:rPr lang="en-US" sz="700" dirty="0">
+                <a:solidFill>
+                  <a:srgbClr val="7E7E7E"/>
+                </a:solidFill>
+                <a:latin typeface="Poppins" pitchFamily="34" charset="0"/>
+                <a:ea typeface="Poppins" pitchFamily="34" charset="-122"/>
+                <a:cs typeface="Poppins" pitchFamily="34" charset="-120"/>
+              </a:rPr>
+              <a:t>Sabio × PayPal  ·  Proactive point of view for Zenith  ·  Confidential</a:t>
+            </a:r>
+            <a:endParaRPr lang="en-US" sz="700" dirty="0"/>
+          </a:p>
+        </p:txBody>
+      </p:sp>
+      <p:sp>
+        <p:nvSpPr>
+          <p:cNvPr id="25" name="Slide Number Placeholder 0"/>
+          <p:cNvSpPr>
+            <a:spLocks noGrp="1"/>
+          </p:cNvSpPr>
+          <p:nvPr>
+            <p:ph type="sldNum" sz="quarter" idx="4294967295"/>
+          </p:nvPr>
+        </p:nvSpPr>
+        <p:spPr>
+          <a:xfrm>
+            <a:off x="457200" y="4832604"/>
+            <a:ext cx="365760" cy="182880"/>
+          </a:xfrm>
+          <a:prstGeom prst="rect">
+            <a:avLst/>
+          </a:prstGeom>
+          <a:extLst>
+            <a:ext uri="{C572A759-6A51-4108-AA02-DFA0A04FC94B}">
+              <ma14:wrappingTextBoxFlag xmlns:ma14="http://schemas.microsoft.com/office/mac/drawingml/2011/main" val="0"/>
+            </a:ext>
+          </a:extLst>
+        </p:spPr>
+        <p:txBody>
+          <a:bodyPr lIns="0" tIns="0" rIns="0" bIns="0"/>
+          <a:lstStyle>
+            <a:lvl1pPr>
+              <a:defRPr sz="800">
+                <a:solidFill>
+                  <a:srgbClr val="7E7E7E"/>
+                </a:solidFill>
+                <a:latin typeface="Poppins SemiBold"/>
+                <a:ea typeface="Poppins SemiBold"/>
+                <a:cs typeface="Poppins SemiBold"/>
+              </a:defRPr>
+            </a:lvl1pPr>
+          </a:lstStyle>
+          <a:p>
+            <a:pPr algn="l"/>
+            <a:fld id="{F7021451-1387-4CA6-816F-3879F97B5CBC}" type="slidenum">
+              <a:rPr b="0" lang="en-US"/>
+              <a:t>1002</a:t>
+            </a:fld>
+            <a:endParaRPr lang="en-US"/>
+          </a:p>
+        </p:txBody>
+      </p:sp>
+    </p:spTree>
+  </p:cSld>
+  <p:clrMapOvr>
+    <a:masterClrMapping/>
+  </p:clrMapOvr>
+</p:sldLayout>
+</file>
+
+<file path=ppt/slideLayouts/slideLayout3.xml><?xml version="1.0" encoding="utf-8"?>
+<p:sldLayout xmlns:a="http://schemas.openxmlformats.org/drawingml/2006/main" xmlns:r="http://schemas.openxmlformats.org/officeDocument/2006/relationships" xmlns:p="http://schemas.openxmlformats.org/presentationml/2006/main" preserve="1">
+  <p:cSld name="SABIO_COVER">
+    <p:bg>
+      <p:bgPr>
+        <a:solidFill>
+          <a:srgbClr val="1A1A1A"/>
+        </a:solidFill>
+      </p:bgPr>
+    </p:bg>
+    <p:spTree>
+      <p:nvGrpSpPr>
+        <p:cNvPr id="1" name=""/>
+        <p:cNvGrpSpPr/>
+        <p:nvPr/>
+      </p:nvGrpSpPr>
+      <p:grpSpPr>
+        <a:xfrm>
+          <a:off x="0" y="0"/>
+          <a:ext cx="0" cy="0"/>
+          <a:chOff x="0" y="0"/>
+          <a:chExt cx="0" cy="0"/>
+        </a:xfrm>
+      </p:grpSpPr>
+      <p:sp>
+        <p:nvSpPr>
+          <p:cNvPr id="2" name="Text 0"/>
+          <p:cNvSpPr/>
+          <p:nvPr/>
+        </p:nvSpPr>
+        <p:spPr>
+          <a:xfrm>
+            <a:off x="457200" y="4832604"/>
+            <a:ext cx="5852160" cy="182880"/>
+          </a:xfrm>
+          <a:prstGeom prst="rect">
+            <a:avLst/>
+          </a:prstGeom>
+          <a:noFill/>
+          <a:ln/>
+        </p:spPr>
+        <p:txBody>
+          <a:bodyPr wrap="square" lIns="0" tIns="0" rIns="0" bIns="0" rtlCol="0" anchor="t"/>
+          <a:lstStyle/>
+          <a:p>
+            <a:pPr indent="0" marL="0">
+              <a:buNone/>
+            </a:pPr>
+            <a:r>
+              <a:rPr lang="en-US" sz="700" dirty="0">
+                <a:solidFill>
+                  <a:srgbClr val="7E7E7E"/>
+                </a:solidFill>
+                <a:latin typeface="Poppins" pitchFamily="34" charset="0"/>
+                <a:ea typeface="Poppins" pitchFamily="34" charset="-122"/>
+                <a:cs typeface="Poppins" pitchFamily="34" charset="-120"/>
+              </a:rPr>
+              <a:t>Sabio Holdings · TSXV: SBIO | OTCQB: SABOF    Creator TV® | App Science® | Sabio</a:t>
+            </a:r>
+            <a:endParaRPr lang="en-US" sz="700" dirty="0"/>
+          </a:p>
+        </p:txBody>
+      </p:sp>
+    </p:spTree>
+  </p:cSld>
+  <p:clrMapOvr>
+    <a:masterClrMapping/>
+  </p:clrMapOvr>
+</p:sldLayout>
+</file>
+
 <file path=ppt/slideMasters/slideMaster1.xml><?xml version="1.0" encoding="utf-8"?>
 <p:sldMaster xmlns:a="http://schemas.openxmlformats.org/drawingml/2006/main" xmlns:r="http://schemas.openxmlformats.org/officeDocument/2006/relationships" xmlns:p="http://schemas.openxmlformats.org/presentationml/2006/main">
   <p:cSld>
@@ -1392,11 +1606,61 @@
           <a:chExt cx="0" cy="0"/>
         </a:xfrm>
       </p:grpSpPr>
+      <p:sp>
+        <p:nvSpPr>
+          <p:cNvPr id="25" name="Slide Number Placeholder 0"/>
+          <p:cNvSpPr>
+            <a:spLocks noGrp="1"/>
+          </p:cNvSpPr>
+          <p:nvPr>
+            <p:ph type="sldNum" sz="quarter" idx="4294967295"/>
+          </p:nvPr>
+        </p:nvSpPr>
+        <p:spPr>
+          <a:xfrm>
+            <a:off x="457200" y="4832604"/>
+            <a:ext cx="365760" cy="182880"/>
+          </a:xfrm>
+          <a:prstGeom prst="rect">
+            <a:avLst/>
+          </a:prstGeom>
+          <a:extLst>
+            <a:ext uri="{C572A759-6A51-4108-AA02-DFA0A04FC94B}">
+              <ma14:wrappingTextBoxFlag xmlns:ma14="http://schemas.microsoft.com/office/mac/drawingml/2011/main" val="0"/>
+            </a:ext>
+          </a:extLst>
+        </p:spPr>
+        <p:txBody>
+          <a:bodyPr lIns="0" tIns="0" rIns="0" bIns="0"/>
+          <a:lstStyle>
+            <a:lvl1pPr>
+              <a:defRPr sz="800">
+                <a:solidFill>
+                  <a:srgbClr val="7E7E7E"/>
+                </a:solidFill>
+                <a:latin typeface="Poppins SemiBold"/>
+                <a:ea typeface="Poppins SemiBold"/>
+                <a:cs typeface="Poppins SemiBold"/>
+              </a:defRPr>
+            </a:lvl1pPr>
+          </a:lstStyle>
+          <a:p>
+            <a:pPr algn="l"/>
+            <a:fld id="{F7021451-1387-4CA6-816F-3879F97B5CBC}" type="slidenum">
+              <a:rPr b="0" lang="en-US"/>
+              <a:t>null</a:t>
+            </a:fld>
+            <a:endParaRPr lang="en-US"/>
+          </a:p>
+        </p:txBody>
+      </p:sp>
     </p:spTree>
   </p:cSld>
   <p:clrMap bg1="lt1" tx1="dk1" bg2="lt2" tx2="dk2" accent1="accent1" accent2="accent2" accent3="accent3" accent4="accent4" accent5="accent5" accent6="accent6" hlink="hlink" folHlink="folHlink"/>
   <p:sldLayoutIdLst>
     <p:sldLayoutId id="2147483649" r:id="rId1"/>
+    <p:sldLayoutId id="2147483650" r:id="rId2"/>
+    <p:sldLayoutId id="2147483651" r:id="rId3"/>
   </p:sldLayoutIdLst>
   <p:hf sldNum="0" hdr="0" ftr="0" dt="0"/>
   <p:txStyles>
@@ -1655,13 +1919,6 @@
 <file path=ppt/slides/slide1.xml><?xml version="1.0" encoding="utf-8"?>
 <p:sld xmlns:a="http://schemas.openxmlformats.org/drawingml/2006/main" xmlns:r="http://schemas.openxmlformats.org/officeDocument/2006/relationships" xmlns:p="http://schemas.openxmlformats.org/presentationml/2006/main">
   <p:cSld name="Slide 1">
-    <p:bg>
-      <p:bgPr>
-        <a:solidFill>
-          <a:srgbClr val="1A1A1A"/>
-        </a:solidFill>
-      </p:bgPr>
-    </p:bg>
     <p:spTree>
       <p:nvGrpSpPr>
         <p:cNvPr id="1" name=""/>
@@ -1678,7 +1935,7 @@
       </p:grpSpPr>
       <p:pic>
         <p:nvPicPr>
-          <p:cNvPr id="2" name="Image 0" descr="/home/claude/benjaminbring-cloud/sabio-deck-builders-/assets/sabio-logo-yellow.png">    </p:cNvPr>
+          <p:cNvPr id="2" name="Image 0" descr="/home/claude/sabio-deck-builders-/assets/sabio-logo-yellow.png">    </p:cNvPr>
           <p:cNvPicPr>
             <a:picLocks noChangeAspect="1"/>
           </p:cNvPicPr>
@@ -2093,45 +2350,6 @@
               <a:t>Total payment volume grew 9% to $486B, but online branded checkout grew 2%. Venmo volume grew 14%. Holiday is where checkout habits get set. [1]</a:t>
             </a:r>
             <a:endParaRPr lang="en-US" sz="900" dirty="0"/>
-          </a:p>
-        </p:txBody>
-      </p:sp>
-      <p:sp>
-        <p:nvSpPr>
-          <p:cNvPr id="13" name="Text 10"/>
-          <p:cNvSpPr txBox="1"/>
-          <p:nvPr/>
-        </p:nvSpPr>
-        <p:spPr>
-          <a:xfrm>
-            <a:off x="457200" y="4832604"/>
-            <a:ext cx="5852160" cy="182880"/>
-          </a:xfrm>
-          <a:prstGeom prst="rect">
-            <a:avLst/>
-          </a:prstGeom>
-          <a:noFill/>
-          <a:ln/>
-        </p:spPr>
-        <p:txBody>
-          <a:bodyPr wrap="square" lIns="0" tIns="0" rIns="0" bIns="0" rtlCol="0" anchor="t"/>
-          <a:lstStyle/>
-          <a:p>
-            <a:pPr indent="0" marL="0">
-              <a:buNone/>
-            </a:pPr>
-            <a:r>
-              <a:rPr lang="en-US" sz="700" dirty="0">
-                <a:solidFill>
-                  <a:srgbClr val="7E7E7E"/>
-                </a:solidFill>
-                <a:latin typeface="Poppins" pitchFamily="34" charset="0"/>
-                <a:ea typeface="Poppins" pitchFamily="34" charset="-122"/>
-                <a:cs typeface="Poppins" pitchFamily="34" charset="-120"/>
-              </a:rPr>
-              <a:t>Sabio Holdings · TSXV: SBIO | OTCQB: SABOF    Creator TV® | App Science® | Sabio</a:t>
-            </a:r>
-            <a:endParaRPr lang="en-US" sz="700" dirty="0"/>
           </a:p>
         </p:txBody>
       </p:sp>
@@ -2146,13 +2364,6 @@
 <file path=ppt/slides/slide10.xml><?xml version="1.0" encoding="utf-8"?>
 <p:sld xmlns:a="http://schemas.openxmlformats.org/drawingml/2006/main" xmlns:r="http://schemas.openxmlformats.org/officeDocument/2006/relationships" xmlns:p="http://schemas.openxmlformats.org/presentationml/2006/main">
   <p:cSld name="Slide 10">
-    <p:bg>
-      <p:bgPr>
-        <a:solidFill>
-          <a:srgbClr val="1A1A1A"/>
-        </a:solidFill>
-      </p:bgPr>
-    </p:bg>
     <p:spTree>
       <p:nvGrpSpPr>
         <p:cNvPr id="1" name=""/>
@@ -2253,120 +2464,38 @@
         </p:nvSpPr>
         <p:spPr>
           <a:xfrm>
-            <a:off x="457200" y="4832604"/>
-            <a:ext cx="365760" cy="182880"/>
-          </a:xfrm>
-          <a:prstGeom prst="rect">
-            <a:avLst/>
-          </a:prstGeom>
-          <a:noFill/>
-          <a:ln/>
-        </p:spPr>
-        <p:txBody>
-          <a:bodyPr wrap="square" lIns="0" tIns="0" rIns="0" bIns="0" rtlCol="0" anchor="t"/>
-          <a:lstStyle/>
-          <a:p>
-            <a:pPr indent="0" marL="0">
-              <a:buNone/>
-            </a:pPr>
-            <a:r>
-              <a:rPr lang="en-US" sz="800" dirty="0">
-                <a:solidFill>
-                  <a:srgbClr val="7E7E7E"/>
-                </a:solidFill>
-                <a:latin typeface="Poppins SemiBold" pitchFamily="34" charset="0"/>
-                <a:ea typeface="Poppins SemiBold" pitchFamily="34" charset="-122"/>
-                <a:cs typeface="Poppins SemiBold" pitchFamily="34" charset="-120"/>
-              </a:rPr>
-              <a:t>10</a:t>
-            </a:r>
-            <a:endParaRPr lang="en-US" sz="800" dirty="0"/>
-          </a:p>
-        </p:txBody>
-      </p:sp>
-      <p:sp>
-        <p:nvSpPr>
-          <p:cNvPr id="5" name="Text 3"/>
-          <p:cNvSpPr txBox="1"/>
-          <p:nvPr/>
-        </p:nvSpPr>
-        <p:spPr>
-          <a:xfrm>
-            <a:off x="868680" y="4832604"/>
-            <a:ext cx="5486400" cy="182880"/>
-          </a:xfrm>
-          <a:prstGeom prst="rect">
-            <a:avLst/>
-          </a:prstGeom>
-          <a:noFill/>
-          <a:ln/>
-        </p:spPr>
-        <p:txBody>
-          <a:bodyPr wrap="square" lIns="0" tIns="0" rIns="0" bIns="0" rtlCol="0" anchor="t"/>
-          <a:lstStyle/>
-          <a:p>
-            <a:pPr indent="0" marL="0">
-              <a:buNone/>
-            </a:pPr>
-            <a:r>
-              <a:rPr lang="en-US" sz="700" dirty="0">
-                <a:solidFill>
-                  <a:srgbClr val="7E7E7E"/>
+            <a:off x="457200" y="1188720"/>
+            <a:ext cx="4023360" cy="3200400"/>
+          </a:xfrm>
+          <a:prstGeom prst="rect">
+            <a:avLst/>
+          </a:prstGeom>
+          <a:noFill/>
+          <a:ln/>
+        </p:spPr>
+        <p:txBody>
+          <a:bodyPr wrap="square" lIns="0" tIns="0" rIns="0" bIns="0" rtlCol="0" anchor="t"/>
+          <a:lstStyle/>
+          <a:p>
+            <a:pPr indent="0" marL="0">
+              <a:spcAft>
+                <a:spcPts val="800"/>
+              </a:spcAft>
+              <a:buNone/>
+            </a:pPr>
+            <a:r>
+              <a:rPr lang="en-US" sz="850" dirty="0">
+                <a:solidFill>
+                  <a:srgbClr val="E3E3E3"/>
                 </a:solidFill>
                 <a:latin typeface="Poppins" pitchFamily="34" charset="0"/>
                 <a:ea typeface="Poppins" pitchFamily="34" charset="-122"/>
                 <a:cs typeface="Poppins" pitchFamily="34" charset="-120"/>
               </a:rPr>
-              <a:t>Sabio × PayPal  ·  Proactive point of view for Zenith  ·  Confidential</a:t>
-            </a:r>
-            <a:endParaRPr lang="en-US" sz="700" dirty="0"/>
-          </a:p>
-        </p:txBody>
-      </p:sp>
-      <p:pic>
-        <p:nvPicPr>
-          <p:cNvPr id="6" name="Image 0" descr="/home/claude/benjaminbring-cloud/sabio-deck-builders-/assets/sabio-logo-white-sm.png">    </p:cNvPr>
-          <p:cNvPicPr>
-            <a:picLocks noChangeAspect="1"/>
-          </p:cNvPicPr>
-          <p:nvPr/>
-        </p:nvPicPr>
-        <p:blipFill>
-          <a:blip r:embed="rId1"/>
-          <a:stretch>
-            <a:fillRect/>
-          </a:stretch>
-        </p:blipFill>
-        <p:spPr>
-          <a:xfrm>
-            <a:off x="8028432" y="4805172"/>
-            <a:ext cx="647572" cy="155448"/>
-          </a:xfrm>
-          <a:prstGeom prst="rect">
-            <a:avLst/>
-          </a:prstGeom>
-        </p:spPr>
-      </p:pic>
-      <p:sp>
-        <p:nvSpPr>
-          <p:cNvPr id="7" name="Text 4"/>
-          <p:cNvSpPr txBox="1"/>
-          <p:nvPr/>
-        </p:nvSpPr>
-        <p:spPr>
-          <a:xfrm>
-            <a:off x="457200" y="1188720"/>
-            <a:ext cx="4023360" cy="3200400"/>
-          </a:xfrm>
-          <a:prstGeom prst="rect">
-            <a:avLst/>
-          </a:prstGeom>
-          <a:noFill/>
-          <a:ln/>
-        </p:spPr>
-        <p:txBody>
-          <a:bodyPr wrap="square" lIns="0" tIns="0" rIns="0" bIns="0" rtlCol="0" anchor="t"/>
-          <a:lstStyle/>
+              <a:t>1.  PayPal Q2 2026 earnings call highlights, MarketBeat, Jul 28, 2026.</a:t>
+            </a:r>
+            <a:endParaRPr lang="en-US" sz="850" dirty="0"/>
+          </a:p>
           <a:p>
             <a:pPr indent="0" marL="0">
               <a:spcAft>
@@ -2383,10 +2512,32 @@
                 <a:ea typeface="Poppins" pitchFamily="34" charset="-122"/>
                 <a:cs typeface="Poppins" pitchFamily="34" charset="-120"/>
               </a:rPr>
-              <a:t>1.  PayPal Q2 2026 earnings call highlights, MarketBeat, Jul 28, 2026.</a:t>
+              <a:t>2.  PayPal 2026 Holiday Shopping Survey, Sep 30, 2026.</a:t>
             </a:r>
             <a:endParaRPr lang="en-US" sz="850" dirty="0"/>
           </a:p>
+        </p:txBody>
+      </p:sp>
+      <p:sp>
+        <p:nvSpPr>
+          <p:cNvPr id="5" name="Text 3"/>
+          <p:cNvSpPr txBox="1"/>
+          <p:nvPr/>
+        </p:nvSpPr>
+        <p:spPr>
+          <a:xfrm>
+            <a:off x="4663440" y="1188720"/>
+            <a:ext cx="4023360" cy="3200400"/>
+          </a:xfrm>
+          <a:prstGeom prst="rect">
+            <a:avLst/>
+          </a:prstGeom>
+          <a:noFill/>
+          <a:ln/>
+        </p:spPr>
+        <p:txBody>
+          <a:bodyPr wrap="square" lIns="0" tIns="0" rIns="0" bIns="0" rtlCol="0" anchor="t"/>
+          <a:lstStyle/>
           <a:p>
             <a:pPr indent="0" marL="0">
               <a:spcAft>
@@ -2403,32 +2554,10 @@
                 <a:ea typeface="Poppins" pitchFamily="34" charset="-122"/>
                 <a:cs typeface="Poppins" pitchFamily="34" charset="-120"/>
               </a:rPr>
-              <a:t>2.  PayPal 2026 Holiday Shopping Survey, Sep 30, 2026.</a:t>
+              <a:t>3.  PayPal Newsroom, The Venmo Credit Card Now Pays Up to 4% Cash Back When You Split with Friends, Oct 5, 2026.</a:t>
             </a:r>
             <a:endParaRPr lang="en-US" sz="850" dirty="0"/>
           </a:p>
-        </p:txBody>
-      </p:sp>
-      <p:sp>
-        <p:nvSpPr>
-          <p:cNvPr id="8" name="Text 5"/>
-          <p:cNvSpPr txBox="1"/>
-          <p:nvPr/>
-        </p:nvSpPr>
-        <p:spPr>
-          <a:xfrm>
-            <a:off x="4663440" y="1188720"/>
-            <a:ext cx="4023360" cy="3200400"/>
-          </a:xfrm>
-          <a:prstGeom prst="rect">
-            <a:avLst/>
-          </a:prstGeom>
-          <a:noFill/>
-          <a:ln/>
-        </p:spPr>
-        <p:txBody>
-          <a:bodyPr wrap="square" lIns="0" tIns="0" rIns="0" bIns="0" rtlCol="0" anchor="t"/>
-          <a:lstStyle/>
           <a:p>
             <a:pPr indent="0" marL="0">
               <a:spcAft>
@@ -2445,29 +2574,57 @@
                 <a:ea typeface="Poppins" pitchFamily="34" charset="-122"/>
                 <a:cs typeface="Poppins" pitchFamily="34" charset="-120"/>
               </a:rPr>
-              <a:t>3.  PayPal Newsroom, The Venmo Credit Card Now Pays Up to 4% Cash Back When You Split with Friends, Oct 5, 2026.</a:t>
+              <a:t>4.  Sabio 2026 Master Case Study Deck.</a:t>
             </a:r>
             <a:endParaRPr lang="en-US" sz="850" dirty="0"/>
           </a:p>
-          <a:p>
-            <a:pPr indent="0" marL="0">
-              <a:spcAft>
-                <a:spcPts val="800"/>
-              </a:spcAft>
-              <a:buNone/>
-            </a:pPr>
-            <a:r>
-              <a:rPr lang="en-US" sz="850" dirty="0">
-                <a:solidFill>
-                  <a:srgbClr val="E3E3E3"/>
-                </a:solidFill>
-                <a:latin typeface="Poppins" pitchFamily="34" charset="0"/>
-                <a:ea typeface="Poppins" pitchFamily="34" charset="-122"/>
-                <a:cs typeface="Poppins" pitchFamily="34" charset="-120"/>
-              </a:rPr>
-              <a:t>4.  Sabio 2026 Master Case Study Deck.</a:t>
-            </a:r>
-            <a:endParaRPr lang="en-US" sz="850" dirty="0"/>
+        </p:txBody>
+      </p:sp>
+      <p:sp>
+        <p:nvSpPr>
+          <p:cNvPr id="25" name="Slide Number Placeholder 0"/>
+          <p:cNvSpPr>
+            <a:spLocks noGrp="1"/>
+          </p:cNvSpPr>
+          <p:nvPr>
+            <p:ph type="sldNum" sz="quarter" idx="4294967295"/>
+          </p:nvPr>
+        </p:nvSpPr>
+        <p:spPr>
+          <a:xfrm>
+            <a:off x="457200" y="4832604"/>
+            <a:ext cx="365760" cy="182880"/>
+          </a:xfrm>
+          <a:prstGeom prst="rect">
+            <a:avLst/>
+          </a:prstGeom>
+          <a:extLst>
+            <a:ext uri="{C572A759-6A51-4108-AA02-DFA0A04FC94B}">
+              <ma14:wrappingTextBoxFlag xmlns:ma14="http://schemas.microsoft.com/office/mac/drawingml/2011/main" val="0"/>
+            </a:ext>
+          </a:extLst>
+        </p:spPr>
+        <p:txBody>
+          <a:bodyPr lIns="0" tIns="0" rIns="0" bIns="0"/>
+          <a:lstStyle>
+            <a:lvl1pPr>
+              <a:defRPr sz="800">
+                <a:solidFill>
+                  <a:srgbClr val="7E7E7E"/>
+                </a:solidFill>
+                <a:latin typeface="Poppins SemiBold"/>
+                <a:ea typeface="Poppins SemiBold"/>
+                <a:cs typeface="Poppins SemiBold"/>
+              </a:defRPr>
+            </a:lvl1pPr>
+          </a:lstStyle>
+          <a:p>
+            <a:pPr algn="l"/>
+            <a:fld id="{F7021451-1387-4CA6-816F-3879F97B5CBC}" type="slidenum">
+              <a:rPr b="0" lang="en-US"/>
+              <a:t>10</a:t>
+            </a:fld>
+            <a:endParaRPr lang="en-US"/>
           </a:p>
         </p:txBody>
       </p:sp>
@@ -2482,13 +2639,6 @@
 <file path=ppt/slides/slide2.xml><?xml version="1.0" encoding="utf-8"?>
 <p:sld xmlns:a="http://schemas.openxmlformats.org/drawingml/2006/main" xmlns:r="http://schemas.openxmlformats.org/officeDocument/2006/relationships" xmlns:p="http://schemas.openxmlformats.org/presentationml/2006/main">
   <p:cSld name="Slide 2">
-    <p:bg>
-      <p:bgPr>
-        <a:solidFill>
-          <a:srgbClr val="1A1A1A"/>
-        </a:solidFill>
-      </p:bgPr>
-    </p:bg>
     <p:spTree>
       <p:nvGrpSpPr>
         <p:cNvPr id="1" name=""/>
@@ -2583,109 +2733,7 @@
       </p:sp>
       <p:sp>
         <p:nvSpPr>
-          <p:cNvPr id="4" name="Text 2"/>
-          <p:cNvSpPr txBox="1"/>
-          <p:nvPr/>
-        </p:nvSpPr>
-        <p:spPr>
-          <a:xfrm>
-            <a:off x="457200" y="4832604"/>
-            <a:ext cx="365760" cy="182880"/>
-          </a:xfrm>
-          <a:prstGeom prst="rect">
-            <a:avLst/>
-          </a:prstGeom>
-          <a:noFill/>
-          <a:ln/>
-        </p:spPr>
-        <p:txBody>
-          <a:bodyPr wrap="square" lIns="0" tIns="0" rIns="0" bIns="0" rtlCol="0" anchor="t"/>
-          <a:lstStyle/>
-          <a:p>
-            <a:pPr indent="0" marL="0">
-              <a:buNone/>
-            </a:pPr>
-            <a:r>
-              <a:rPr lang="en-US" sz="800" dirty="0">
-                <a:solidFill>
-                  <a:srgbClr val="7E7E7E"/>
-                </a:solidFill>
-                <a:latin typeface="Poppins SemiBold" pitchFamily="34" charset="0"/>
-                <a:ea typeface="Poppins SemiBold" pitchFamily="34" charset="-122"/>
-                <a:cs typeface="Poppins SemiBold" pitchFamily="34" charset="-120"/>
-              </a:rPr>
-              <a:t>2</a:t>
-            </a:r>
-            <a:endParaRPr lang="en-US" sz="800" dirty="0"/>
-          </a:p>
-        </p:txBody>
-      </p:sp>
-      <p:sp>
-        <p:nvSpPr>
-          <p:cNvPr id="5" name="Text 3"/>
-          <p:cNvSpPr txBox="1"/>
-          <p:nvPr/>
-        </p:nvSpPr>
-        <p:spPr>
-          <a:xfrm>
-            <a:off x="868680" y="4832604"/>
-            <a:ext cx="5486400" cy="182880"/>
-          </a:xfrm>
-          <a:prstGeom prst="rect">
-            <a:avLst/>
-          </a:prstGeom>
-          <a:noFill/>
-          <a:ln/>
-        </p:spPr>
-        <p:txBody>
-          <a:bodyPr wrap="square" lIns="0" tIns="0" rIns="0" bIns="0" rtlCol="0" anchor="t"/>
-          <a:lstStyle/>
-          <a:p>
-            <a:pPr indent="0" marL="0">
-              <a:buNone/>
-            </a:pPr>
-            <a:r>
-              <a:rPr lang="en-US" sz="700" dirty="0">
-                <a:solidFill>
-                  <a:srgbClr val="7E7E7E"/>
-                </a:solidFill>
-                <a:latin typeface="Poppins" pitchFamily="34" charset="0"/>
-                <a:ea typeface="Poppins" pitchFamily="34" charset="-122"/>
-                <a:cs typeface="Poppins" pitchFamily="34" charset="-120"/>
-              </a:rPr>
-              <a:t>Sabio × PayPal  ·  Proactive point of view for Zenith  ·  Confidential</a:t>
-            </a:r>
-            <a:endParaRPr lang="en-US" sz="700" dirty="0"/>
-          </a:p>
-        </p:txBody>
-      </p:sp>
-      <p:pic>
-        <p:nvPicPr>
-          <p:cNvPr id="6" name="Image 0" descr="/home/claude/benjaminbring-cloud/sabio-deck-builders-/assets/sabio-logo-white-sm.png">    </p:cNvPr>
-          <p:cNvPicPr>
-            <a:picLocks noChangeAspect="1"/>
-          </p:cNvPicPr>
-          <p:nvPr/>
-        </p:nvPicPr>
-        <p:blipFill>
-          <a:blip r:embed="rId1"/>
-          <a:stretch>
-            <a:fillRect/>
-          </a:stretch>
-        </p:blipFill>
-        <p:spPr>
-          <a:xfrm>
-            <a:off x="8028432" y="4805172"/>
-            <a:ext cx="647572" cy="155448"/>
-          </a:xfrm>
-          <a:prstGeom prst="rect">
-            <a:avLst/>
-          </a:prstGeom>
-        </p:spPr>
-      </p:pic>
-      <p:sp>
-        <p:nvSpPr>
-          <p:cNvPr id="7" name="Shape 4"/>
+          <p:cNvPr id="4" name="Shape 2"/>
           <p:cNvSpPr/>
           <p:nvPr/>
         </p:nvSpPr>
@@ -2710,7 +2758,7 @@
       </p:sp>
       <p:sp>
         <p:nvSpPr>
-          <p:cNvPr id="8" name="Text 5"/>
+          <p:cNvPr id="5" name="Text 3"/>
           <p:cNvSpPr txBox="1"/>
           <p:nvPr/>
         </p:nvSpPr>
@@ -2749,7 +2797,7 @@
       </p:sp>
       <p:sp>
         <p:nvSpPr>
-          <p:cNvPr id="9" name="Text 6"/>
+          <p:cNvPr id="6" name="Text 4"/>
           <p:cNvSpPr txBox="1"/>
           <p:nvPr/>
         </p:nvSpPr>
@@ -2788,7 +2836,7 @@
       </p:sp>
       <p:sp>
         <p:nvSpPr>
-          <p:cNvPr id="10" name="Text 7"/>
+          <p:cNvPr id="7" name="Text 5"/>
           <p:cNvSpPr txBox="1"/>
           <p:nvPr/>
         </p:nvSpPr>
@@ -2827,7 +2875,7 @@
       </p:sp>
       <p:sp>
         <p:nvSpPr>
-          <p:cNvPr id="11" name="Shape 8"/>
+          <p:cNvPr id="8" name="Shape 6"/>
           <p:cNvSpPr/>
           <p:nvPr/>
         </p:nvSpPr>
@@ -2852,7 +2900,7 @@
       </p:sp>
       <p:sp>
         <p:nvSpPr>
-          <p:cNvPr id="12" name="Text 9"/>
+          <p:cNvPr id="9" name="Text 7"/>
           <p:cNvSpPr txBox="1"/>
           <p:nvPr/>
         </p:nvSpPr>
@@ -2891,7 +2939,7 @@
       </p:sp>
       <p:sp>
         <p:nvSpPr>
-          <p:cNvPr id="13" name="Text 10"/>
+          <p:cNvPr id="10" name="Text 8"/>
           <p:cNvSpPr txBox="1"/>
           <p:nvPr/>
         </p:nvSpPr>
@@ -2930,7 +2978,7 @@
       </p:sp>
       <p:sp>
         <p:nvSpPr>
-          <p:cNvPr id="14" name="Shape 11"/>
+          <p:cNvPr id="11" name="Shape 9"/>
           <p:cNvSpPr/>
           <p:nvPr/>
         </p:nvSpPr>
@@ -2955,7 +3003,7 @@
       </p:sp>
       <p:sp>
         <p:nvSpPr>
-          <p:cNvPr id="15" name="Text 12"/>
+          <p:cNvPr id="12" name="Text 10"/>
           <p:cNvSpPr txBox="1"/>
           <p:nvPr/>
         </p:nvSpPr>
@@ -2994,7 +3042,7 @@
       </p:sp>
       <p:sp>
         <p:nvSpPr>
-          <p:cNvPr id="16" name="Text 13"/>
+          <p:cNvPr id="13" name="Text 11"/>
           <p:cNvSpPr txBox="1"/>
           <p:nvPr/>
         </p:nvSpPr>
@@ -3033,7 +3081,7 @@
       </p:sp>
       <p:sp>
         <p:nvSpPr>
-          <p:cNvPr id="17" name="Text 14"/>
+          <p:cNvPr id="14" name="Text 12"/>
           <p:cNvSpPr txBox="1"/>
           <p:nvPr/>
         </p:nvSpPr>
@@ -3072,7 +3120,7 @@
       </p:sp>
       <p:sp>
         <p:nvSpPr>
-          <p:cNvPr id="18" name="Shape 15"/>
+          <p:cNvPr id="15" name="Shape 13"/>
           <p:cNvSpPr/>
           <p:nvPr/>
         </p:nvSpPr>
@@ -3097,7 +3145,7 @@
       </p:sp>
       <p:sp>
         <p:nvSpPr>
-          <p:cNvPr id="19" name="Text 16"/>
+          <p:cNvPr id="16" name="Text 14"/>
           <p:cNvSpPr txBox="1"/>
           <p:nvPr/>
         </p:nvSpPr>
@@ -3136,7 +3184,7 @@
       </p:sp>
       <p:sp>
         <p:nvSpPr>
-          <p:cNvPr id="20" name="Text 17"/>
+          <p:cNvPr id="17" name="Text 15"/>
           <p:cNvSpPr txBox="1"/>
           <p:nvPr/>
         </p:nvSpPr>
@@ -3175,7 +3223,7 @@
       </p:sp>
       <p:sp>
         <p:nvSpPr>
-          <p:cNvPr id="21" name="Shape 18"/>
+          <p:cNvPr id="18" name="Shape 16"/>
           <p:cNvSpPr/>
           <p:nvPr/>
         </p:nvSpPr>
@@ -3200,7 +3248,7 @@
       </p:sp>
       <p:sp>
         <p:nvSpPr>
-          <p:cNvPr id="22" name="Text 19"/>
+          <p:cNvPr id="19" name="Text 17"/>
           <p:cNvSpPr txBox="1"/>
           <p:nvPr/>
         </p:nvSpPr>
@@ -3239,7 +3287,7 @@
       </p:sp>
       <p:sp>
         <p:nvSpPr>
-          <p:cNvPr id="23" name="Text 20"/>
+          <p:cNvPr id="20" name="Text 18"/>
           <p:cNvSpPr txBox="1"/>
           <p:nvPr/>
         </p:nvSpPr>
@@ -3278,7 +3326,7 @@
       </p:sp>
       <p:sp>
         <p:nvSpPr>
-          <p:cNvPr id="24" name="Text 21"/>
+          <p:cNvPr id="21" name="Text 19"/>
           <p:cNvSpPr txBox="1"/>
           <p:nvPr/>
         </p:nvSpPr>
@@ -3317,7 +3365,7 @@
       </p:sp>
       <p:sp>
         <p:nvSpPr>
-          <p:cNvPr id="25" name="Shape 22"/>
+          <p:cNvPr id="22" name="Shape 20"/>
           <p:cNvSpPr/>
           <p:nvPr/>
         </p:nvSpPr>
@@ -3342,7 +3390,7 @@
       </p:sp>
       <p:sp>
         <p:nvSpPr>
-          <p:cNvPr id="26" name="Text 23"/>
+          <p:cNvPr id="23" name="Text 21"/>
           <p:cNvSpPr txBox="1"/>
           <p:nvPr/>
         </p:nvSpPr>
@@ -3381,7 +3429,7 @@
       </p:sp>
       <p:sp>
         <p:nvSpPr>
-          <p:cNvPr id="27" name="Text 24"/>
+          <p:cNvPr id="24" name="Text 22"/>
           <p:cNvSpPr txBox="1"/>
           <p:nvPr/>
         </p:nvSpPr>
@@ -3420,7 +3468,7 @@
       </p:sp>
       <p:sp>
         <p:nvSpPr>
-          <p:cNvPr id="28" name="Shape 25"/>
+          <p:cNvPr id="25" name="Shape 23"/>
           <p:cNvSpPr/>
           <p:nvPr/>
         </p:nvSpPr>
@@ -3445,7 +3493,7 @@
       </p:sp>
       <p:sp>
         <p:nvSpPr>
-          <p:cNvPr id="29" name="Text 26"/>
+          <p:cNvPr id="26" name="Text 24"/>
           <p:cNvSpPr txBox="1"/>
           <p:nvPr/>
         </p:nvSpPr>
@@ -3484,7 +3532,7 @@
       </p:sp>
       <p:sp>
         <p:nvSpPr>
-          <p:cNvPr id="30" name="Text 27"/>
+          <p:cNvPr id="27" name="Text 25"/>
           <p:cNvSpPr txBox="1"/>
           <p:nvPr/>
         </p:nvSpPr>
@@ -3523,7 +3571,7 @@
       </p:sp>
       <p:sp>
         <p:nvSpPr>
-          <p:cNvPr id="31" name="Text 28"/>
+          <p:cNvPr id="28" name="Text 26"/>
           <p:cNvSpPr txBox="1"/>
           <p:nvPr/>
         </p:nvSpPr>
@@ -3562,7 +3610,7 @@
       </p:sp>
       <p:sp>
         <p:nvSpPr>
-          <p:cNvPr id="32" name="Shape 29"/>
+          <p:cNvPr id="29" name="Shape 27"/>
           <p:cNvSpPr/>
           <p:nvPr/>
         </p:nvSpPr>
@@ -3587,7 +3635,7 @@
       </p:sp>
       <p:sp>
         <p:nvSpPr>
-          <p:cNvPr id="33" name="Text 30"/>
+          <p:cNvPr id="30" name="Text 28"/>
           <p:cNvSpPr txBox="1"/>
           <p:nvPr/>
         </p:nvSpPr>
@@ -3626,7 +3674,7 @@
       </p:sp>
       <p:sp>
         <p:nvSpPr>
-          <p:cNvPr id="34" name="Text 31"/>
+          <p:cNvPr id="31" name="Text 29"/>
           <p:cNvSpPr txBox="1"/>
           <p:nvPr/>
         </p:nvSpPr>
@@ -3660,6 +3708,54 @@
               <a:t>Group holiday plans are a ready-made audience for the card.</a:t>
             </a:r>
             <a:endParaRPr lang="en-US" sz="800" dirty="0"/>
+          </a:p>
+        </p:txBody>
+      </p:sp>
+      <p:sp>
+        <p:nvSpPr>
+          <p:cNvPr id="25" name="Slide Number Placeholder 0"/>
+          <p:cNvSpPr>
+            <a:spLocks noGrp="1"/>
+          </p:cNvSpPr>
+          <p:nvPr>
+            <p:ph type="sldNum" sz="quarter" idx="4294967295"/>
+          </p:nvPr>
+        </p:nvSpPr>
+        <p:spPr>
+          <a:xfrm>
+            <a:off x="457200" y="4832604"/>
+            <a:ext cx="365760" cy="182880"/>
+          </a:xfrm>
+          <a:prstGeom prst="rect">
+            <a:avLst/>
+          </a:prstGeom>
+          <a:extLst>
+            <a:ext uri="{C572A759-6A51-4108-AA02-DFA0A04FC94B}">
+              <ma14:wrappingTextBoxFlag xmlns:ma14="http://schemas.microsoft.com/office/mac/drawingml/2011/main" val="0"/>
+            </a:ext>
+          </a:extLst>
+        </p:spPr>
+        <p:txBody>
+          <a:bodyPr lIns="0" tIns="0" rIns="0" bIns="0"/>
+          <a:lstStyle>
+            <a:lvl1pPr>
+              <a:defRPr sz="800">
+                <a:solidFill>
+                  <a:srgbClr val="7E7E7E"/>
+                </a:solidFill>
+                <a:latin typeface="Poppins SemiBold"/>
+                <a:ea typeface="Poppins SemiBold"/>
+                <a:cs typeface="Poppins SemiBold"/>
+              </a:defRPr>
+            </a:lvl1pPr>
+          </a:lstStyle>
+          <a:p>
+            <a:pPr algn="l"/>
+            <a:fld id="{F7021451-1387-4CA6-816F-3879F97B5CBC}" type="slidenum">
+              <a:rPr b="0" lang="en-US"/>
+              <a:t>2</a:t>
+            </a:fld>
+            <a:endParaRPr lang="en-US"/>
           </a:p>
         </p:txBody>
       </p:sp>
@@ -3674,13 +3770,6 @@
 <file path=ppt/slides/slide3.xml><?xml version="1.0" encoding="utf-8"?>
 <p:sld xmlns:a="http://schemas.openxmlformats.org/drawingml/2006/main" xmlns:r="http://schemas.openxmlformats.org/officeDocument/2006/relationships" xmlns:p="http://schemas.openxmlformats.org/presentationml/2006/main">
   <p:cSld name="Slide 3">
-    <p:bg>
-      <p:bgPr>
-        <a:solidFill>
-          <a:srgbClr val="1A1A1A"/>
-        </a:solidFill>
-      </p:bgPr>
-    </p:bg>
     <p:spTree>
       <p:nvGrpSpPr>
         <p:cNvPr id="1" name=""/>
@@ -3775,109 +3864,7 @@
       </p:sp>
       <p:sp>
         <p:nvSpPr>
-          <p:cNvPr id="4" name="Text 2"/>
-          <p:cNvSpPr txBox="1"/>
-          <p:nvPr/>
-        </p:nvSpPr>
-        <p:spPr>
-          <a:xfrm>
-            <a:off x="457200" y="4832604"/>
-            <a:ext cx="365760" cy="182880"/>
-          </a:xfrm>
-          <a:prstGeom prst="rect">
-            <a:avLst/>
-          </a:prstGeom>
-          <a:noFill/>
-          <a:ln/>
-        </p:spPr>
-        <p:txBody>
-          <a:bodyPr wrap="square" lIns="0" tIns="0" rIns="0" bIns="0" rtlCol="0" anchor="t"/>
-          <a:lstStyle/>
-          <a:p>
-            <a:pPr indent="0" marL="0">
-              <a:buNone/>
-            </a:pPr>
-            <a:r>
-              <a:rPr lang="en-US" sz="800" dirty="0">
-                <a:solidFill>
-                  <a:srgbClr val="7E7E7E"/>
-                </a:solidFill>
-                <a:latin typeface="Poppins SemiBold" pitchFamily="34" charset="0"/>
-                <a:ea typeface="Poppins SemiBold" pitchFamily="34" charset="-122"/>
-                <a:cs typeface="Poppins SemiBold" pitchFamily="34" charset="-120"/>
-              </a:rPr>
-              <a:t>3</a:t>
-            </a:r>
-            <a:endParaRPr lang="en-US" sz="800" dirty="0"/>
-          </a:p>
-        </p:txBody>
-      </p:sp>
-      <p:sp>
-        <p:nvSpPr>
-          <p:cNvPr id="5" name="Text 3"/>
-          <p:cNvSpPr txBox="1"/>
-          <p:nvPr/>
-        </p:nvSpPr>
-        <p:spPr>
-          <a:xfrm>
-            <a:off x="868680" y="4832604"/>
-            <a:ext cx="5486400" cy="182880"/>
-          </a:xfrm>
-          <a:prstGeom prst="rect">
-            <a:avLst/>
-          </a:prstGeom>
-          <a:noFill/>
-          <a:ln/>
-        </p:spPr>
-        <p:txBody>
-          <a:bodyPr wrap="square" lIns="0" tIns="0" rIns="0" bIns="0" rtlCol="0" anchor="t"/>
-          <a:lstStyle/>
-          <a:p>
-            <a:pPr indent="0" marL="0">
-              <a:buNone/>
-            </a:pPr>
-            <a:r>
-              <a:rPr lang="en-US" sz="700" dirty="0">
-                <a:solidFill>
-                  <a:srgbClr val="7E7E7E"/>
-                </a:solidFill>
-                <a:latin typeface="Poppins" pitchFamily="34" charset="0"/>
-                <a:ea typeface="Poppins" pitchFamily="34" charset="-122"/>
-                <a:cs typeface="Poppins" pitchFamily="34" charset="-120"/>
-              </a:rPr>
-              <a:t>Sabio × PayPal  ·  Proactive point of view for Zenith  ·  Confidential</a:t>
-            </a:r>
-            <a:endParaRPr lang="en-US" sz="700" dirty="0"/>
-          </a:p>
-        </p:txBody>
-      </p:sp>
-      <p:pic>
-        <p:nvPicPr>
-          <p:cNvPr id="6" name="Image 0" descr="/home/claude/benjaminbring-cloud/sabio-deck-builders-/assets/sabio-logo-white-sm.png">    </p:cNvPr>
-          <p:cNvPicPr>
-            <a:picLocks noChangeAspect="1"/>
-          </p:cNvPicPr>
-          <p:nvPr/>
-        </p:nvPicPr>
-        <p:blipFill>
-          <a:blip r:embed="rId1"/>
-          <a:stretch>
-            <a:fillRect/>
-          </a:stretch>
-        </p:blipFill>
-        <p:spPr>
-          <a:xfrm>
-            <a:off x="8028432" y="4805172"/>
-            <a:ext cx="647572" cy="155448"/>
-          </a:xfrm>
-          <a:prstGeom prst="rect">
-            <a:avLst/>
-          </a:prstGeom>
-        </p:spPr>
-      </p:pic>
-      <p:sp>
-        <p:nvSpPr>
-          <p:cNvPr id="7" name="Shape 4"/>
+          <p:cNvPr id="4" name="Shape 2"/>
           <p:cNvSpPr/>
           <p:nvPr/>
         </p:nvSpPr>
@@ -3902,7 +3889,7 @@
       </p:sp>
       <p:sp>
         <p:nvSpPr>
-          <p:cNvPr id="8" name="Text 5"/>
+          <p:cNvPr id="5" name="Text 3"/>
           <p:cNvSpPr txBox="1"/>
           <p:nvPr/>
         </p:nvSpPr>
@@ -3941,7 +3928,7 @@
       </p:sp>
       <p:sp>
         <p:nvSpPr>
-          <p:cNvPr id="9" name="Text 6"/>
+          <p:cNvPr id="6" name="Text 4"/>
           <p:cNvSpPr txBox="1"/>
           <p:nvPr/>
         </p:nvSpPr>
@@ -3980,7 +3967,7 @@
       </p:sp>
       <p:sp>
         <p:nvSpPr>
-          <p:cNvPr id="10" name="Text 7"/>
+          <p:cNvPr id="7" name="Text 5"/>
           <p:cNvSpPr txBox="1"/>
           <p:nvPr/>
         </p:nvSpPr>
@@ -4019,7 +4006,7 @@
       </p:sp>
       <p:sp>
         <p:nvSpPr>
-          <p:cNvPr id="11" name="Text 8"/>
+          <p:cNvPr id="8" name="Text 6"/>
           <p:cNvSpPr txBox="1"/>
           <p:nvPr/>
         </p:nvSpPr>
@@ -4058,7 +4045,7 @@
       </p:sp>
       <p:sp>
         <p:nvSpPr>
-          <p:cNvPr id="12" name="Text 9"/>
+          <p:cNvPr id="9" name="Text 7"/>
           <p:cNvSpPr txBox="1"/>
           <p:nvPr/>
         </p:nvSpPr>
@@ -4097,7 +4084,7 @@
       </p:sp>
       <p:sp>
         <p:nvSpPr>
-          <p:cNvPr id="13" name="Text 10"/>
+          <p:cNvPr id="10" name="Text 8"/>
           <p:cNvSpPr txBox="1"/>
           <p:nvPr/>
         </p:nvSpPr>
@@ -4136,7 +4123,7 @@
       </p:sp>
       <p:sp>
         <p:nvSpPr>
-          <p:cNvPr id="14" name="Text 11"/>
+          <p:cNvPr id="11" name="Text 9"/>
           <p:cNvSpPr txBox="1"/>
           <p:nvPr/>
         </p:nvSpPr>
@@ -4175,7 +4162,7 @@
       </p:sp>
       <p:sp>
         <p:nvSpPr>
-          <p:cNvPr id="15" name="Text 12"/>
+          <p:cNvPr id="12" name="Text 10"/>
           <p:cNvSpPr txBox="1"/>
           <p:nvPr/>
         </p:nvSpPr>
@@ -4214,7 +4201,7 @@
       </p:sp>
       <p:sp>
         <p:nvSpPr>
-          <p:cNvPr id="16" name="Text 13"/>
+          <p:cNvPr id="13" name="Text 11"/>
           <p:cNvSpPr txBox="1"/>
           <p:nvPr/>
         </p:nvSpPr>
@@ -4253,7 +4240,7 @@
       </p:sp>
       <p:sp>
         <p:nvSpPr>
-          <p:cNvPr id="17" name="Text 14"/>
+          <p:cNvPr id="14" name="Text 12"/>
           <p:cNvSpPr txBox="1"/>
           <p:nvPr/>
         </p:nvSpPr>
@@ -4287,6 +4274,54 @@
               <a:t>Shoppers plan gifts early and pay later. We put the reason to choose PayPal on the TV, then follow the same home to the phone.</a:t>
             </a:r>
             <a:endParaRPr lang="en-US" sz="950" dirty="0"/>
+          </a:p>
+        </p:txBody>
+      </p:sp>
+      <p:sp>
+        <p:nvSpPr>
+          <p:cNvPr id="25" name="Slide Number Placeholder 0"/>
+          <p:cNvSpPr>
+            <a:spLocks noGrp="1"/>
+          </p:cNvSpPr>
+          <p:nvPr>
+            <p:ph type="sldNum" sz="quarter" idx="4294967295"/>
+          </p:nvPr>
+        </p:nvSpPr>
+        <p:spPr>
+          <a:xfrm>
+            <a:off x="457200" y="4832604"/>
+            <a:ext cx="365760" cy="182880"/>
+          </a:xfrm>
+          <a:prstGeom prst="rect">
+            <a:avLst/>
+          </a:prstGeom>
+          <a:extLst>
+            <a:ext uri="{C572A759-6A51-4108-AA02-DFA0A04FC94B}">
+              <ma14:wrappingTextBoxFlag xmlns:ma14="http://schemas.microsoft.com/office/mac/drawingml/2011/main" val="0"/>
+            </a:ext>
+          </a:extLst>
+        </p:spPr>
+        <p:txBody>
+          <a:bodyPr lIns="0" tIns="0" rIns="0" bIns="0"/>
+          <a:lstStyle>
+            <a:lvl1pPr>
+              <a:defRPr sz="800">
+                <a:solidFill>
+                  <a:srgbClr val="7E7E7E"/>
+                </a:solidFill>
+                <a:latin typeface="Poppins SemiBold"/>
+                <a:ea typeface="Poppins SemiBold"/>
+                <a:cs typeface="Poppins SemiBold"/>
+              </a:defRPr>
+            </a:lvl1pPr>
+          </a:lstStyle>
+          <a:p>
+            <a:pPr algn="l"/>
+            <a:fld id="{F7021451-1387-4CA6-816F-3879F97B5CBC}" type="slidenum">
+              <a:rPr b="0" lang="en-US"/>
+              <a:t>3</a:t>
+            </a:fld>
+            <a:endParaRPr lang="en-US"/>
           </a:p>
         </p:txBody>
       </p:sp>
@@ -4301,13 +4336,6 @@
 <file path=ppt/slides/slide4.xml><?xml version="1.0" encoding="utf-8"?>
 <p:sld xmlns:a="http://schemas.openxmlformats.org/drawingml/2006/main" xmlns:r="http://schemas.openxmlformats.org/officeDocument/2006/relationships" xmlns:p="http://schemas.openxmlformats.org/presentationml/2006/main">
   <p:cSld name="Slide 4">
-    <p:bg>
-      <p:bgPr>
-        <a:solidFill>
-          <a:srgbClr val="1A1A1A"/>
-        </a:solidFill>
-      </p:bgPr>
-    </p:bg>
     <p:spTree>
       <p:nvGrpSpPr>
         <p:cNvPr id="1" name=""/>
@@ -4402,109 +4430,7 @@
       </p:sp>
       <p:sp>
         <p:nvSpPr>
-          <p:cNvPr id="4" name="Text 2"/>
-          <p:cNvSpPr txBox="1"/>
-          <p:nvPr/>
-        </p:nvSpPr>
-        <p:spPr>
-          <a:xfrm>
-            <a:off x="457200" y="4832604"/>
-            <a:ext cx="365760" cy="182880"/>
-          </a:xfrm>
-          <a:prstGeom prst="rect">
-            <a:avLst/>
-          </a:prstGeom>
-          <a:noFill/>
-          <a:ln/>
-        </p:spPr>
-        <p:txBody>
-          <a:bodyPr wrap="square" lIns="0" tIns="0" rIns="0" bIns="0" rtlCol="0" anchor="t"/>
-          <a:lstStyle/>
-          <a:p>
-            <a:pPr indent="0" marL="0">
-              <a:buNone/>
-            </a:pPr>
-            <a:r>
-              <a:rPr lang="en-US" sz="800" dirty="0">
-                <a:solidFill>
-                  <a:srgbClr val="7E7E7E"/>
-                </a:solidFill>
-                <a:latin typeface="Poppins SemiBold" pitchFamily="34" charset="0"/>
-                <a:ea typeface="Poppins SemiBold" pitchFamily="34" charset="-122"/>
-                <a:cs typeface="Poppins SemiBold" pitchFamily="34" charset="-120"/>
-              </a:rPr>
-              <a:t>4</a:t>
-            </a:r>
-            <a:endParaRPr lang="en-US" sz="800" dirty="0"/>
-          </a:p>
-        </p:txBody>
-      </p:sp>
-      <p:sp>
-        <p:nvSpPr>
-          <p:cNvPr id="5" name="Text 3"/>
-          <p:cNvSpPr txBox="1"/>
-          <p:nvPr/>
-        </p:nvSpPr>
-        <p:spPr>
-          <a:xfrm>
-            <a:off x="868680" y="4832604"/>
-            <a:ext cx="5486400" cy="182880"/>
-          </a:xfrm>
-          <a:prstGeom prst="rect">
-            <a:avLst/>
-          </a:prstGeom>
-          <a:noFill/>
-          <a:ln/>
-        </p:spPr>
-        <p:txBody>
-          <a:bodyPr wrap="square" lIns="0" tIns="0" rIns="0" bIns="0" rtlCol="0" anchor="t"/>
-          <a:lstStyle/>
-          <a:p>
-            <a:pPr indent="0" marL="0">
-              <a:buNone/>
-            </a:pPr>
-            <a:r>
-              <a:rPr lang="en-US" sz="700" dirty="0">
-                <a:solidFill>
-                  <a:srgbClr val="7E7E7E"/>
-                </a:solidFill>
-                <a:latin typeface="Poppins" pitchFamily="34" charset="0"/>
-                <a:ea typeface="Poppins" pitchFamily="34" charset="-122"/>
-                <a:cs typeface="Poppins" pitchFamily="34" charset="-120"/>
-              </a:rPr>
-              <a:t>Sabio × PayPal  ·  Proactive point of view for Zenith  ·  Confidential</a:t>
-            </a:r>
-            <a:endParaRPr lang="en-US" sz="700" dirty="0"/>
-          </a:p>
-        </p:txBody>
-      </p:sp>
-      <p:pic>
-        <p:nvPicPr>
-          <p:cNvPr id="6" name="Image 0" descr="/home/claude/benjaminbring-cloud/sabio-deck-builders-/assets/sabio-logo-white-sm.png">    </p:cNvPr>
-          <p:cNvPicPr>
-            <a:picLocks noChangeAspect="1"/>
-          </p:cNvPicPr>
-          <p:nvPr/>
-        </p:nvPicPr>
-        <p:blipFill>
-          <a:blip r:embed="rId1"/>
-          <a:stretch>
-            <a:fillRect/>
-          </a:stretch>
-        </p:blipFill>
-        <p:spPr>
-          <a:xfrm>
-            <a:off x="8028432" y="4805172"/>
-            <a:ext cx="647572" cy="155448"/>
-          </a:xfrm>
-          <a:prstGeom prst="rect">
-            <a:avLst/>
-          </a:prstGeom>
-        </p:spPr>
-      </p:pic>
-      <p:sp>
-        <p:nvSpPr>
-          <p:cNvPr id="7" name="Shape 4"/>
+          <p:cNvPr id="4" name="Shape 2"/>
           <p:cNvSpPr/>
           <p:nvPr/>
         </p:nvSpPr>
@@ -4529,7 +4455,7 @@
       </p:sp>
       <p:sp>
         <p:nvSpPr>
-          <p:cNvPr id="8" name="Text 5"/>
+          <p:cNvPr id="5" name="Text 3"/>
           <p:cNvSpPr txBox="1"/>
           <p:nvPr/>
         </p:nvSpPr>
@@ -4568,7 +4494,7 @@
       </p:sp>
       <p:sp>
         <p:nvSpPr>
-          <p:cNvPr id="9" name="Text 6"/>
+          <p:cNvPr id="6" name="Text 4"/>
           <p:cNvSpPr txBox="1"/>
           <p:nvPr/>
         </p:nvSpPr>
@@ -4607,7 +4533,7 @@
       </p:sp>
       <p:sp>
         <p:nvSpPr>
-          <p:cNvPr id="10" name="Shape 7"/>
+          <p:cNvPr id="7" name="Shape 5"/>
           <p:cNvSpPr/>
           <p:nvPr/>
         </p:nvSpPr>
@@ -4632,7 +4558,7 @@
       </p:sp>
       <p:sp>
         <p:nvSpPr>
-          <p:cNvPr id="11" name="Text 8"/>
+          <p:cNvPr id="8" name="Text 6"/>
           <p:cNvSpPr txBox="1"/>
           <p:nvPr/>
         </p:nvSpPr>
@@ -4671,7 +4597,7 @@
       </p:sp>
       <p:sp>
         <p:nvSpPr>
-          <p:cNvPr id="12" name="Text 9"/>
+          <p:cNvPr id="9" name="Text 7"/>
           <p:cNvSpPr txBox="1"/>
           <p:nvPr/>
         </p:nvSpPr>
@@ -4710,7 +4636,7 @@
       </p:sp>
       <p:sp>
         <p:nvSpPr>
-          <p:cNvPr id="13" name="Shape 10"/>
+          <p:cNvPr id="10" name="Shape 8"/>
           <p:cNvSpPr/>
           <p:nvPr/>
         </p:nvSpPr>
@@ -4735,7 +4661,7 @@
       </p:sp>
       <p:sp>
         <p:nvSpPr>
-          <p:cNvPr id="14" name="Text 11"/>
+          <p:cNvPr id="11" name="Text 9"/>
           <p:cNvSpPr txBox="1"/>
           <p:nvPr/>
         </p:nvSpPr>
@@ -4774,7 +4700,7 @@
       </p:sp>
       <p:sp>
         <p:nvSpPr>
-          <p:cNvPr id="15" name="Text 12"/>
+          <p:cNvPr id="12" name="Text 10"/>
           <p:cNvSpPr txBox="1"/>
           <p:nvPr/>
         </p:nvSpPr>
@@ -4813,7 +4739,7 @@
       </p:sp>
       <p:sp>
         <p:nvSpPr>
-          <p:cNvPr id="16" name="Shape 13"/>
+          <p:cNvPr id="13" name="Shape 11"/>
           <p:cNvSpPr/>
           <p:nvPr/>
         </p:nvSpPr>
@@ -4838,7 +4764,7 @@
       </p:sp>
       <p:sp>
         <p:nvSpPr>
-          <p:cNvPr id="17" name="Text 14"/>
+          <p:cNvPr id="14" name="Text 12"/>
           <p:cNvSpPr txBox="1"/>
           <p:nvPr/>
         </p:nvSpPr>
@@ -4877,7 +4803,7 @@
       </p:sp>
       <p:sp>
         <p:nvSpPr>
-          <p:cNvPr id="18" name="Text 15"/>
+          <p:cNvPr id="15" name="Text 13"/>
           <p:cNvSpPr txBox="1"/>
           <p:nvPr/>
         </p:nvSpPr>
@@ -4916,7 +4842,7 @@
       </p:sp>
       <p:sp>
         <p:nvSpPr>
-          <p:cNvPr id="19" name="Shape 16"/>
+          <p:cNvPr id="16" name="Shape 14"/>
           <p:cNvSpPr/>
           <p:nvPr/>
         </p:nvSpPr>
@@ -4941,7 +4867,7 @@
       </p:sp>
       <p:sp>
         <p:nvSpPr>
-          <p:cNvPr id="20" name="Text 17"/>
+          <p:cNvPr id="17" name="Text 15"/>
           <p:cNvSpPr txBox="1"/>
           <p:nvPr/>
         </p:nvSpPr>
@@ -4980,7 +4906,7 @@
       </p:sp>
       <p:sp>
         <p:nvSpPr>
-          <p:cNvPr id="21" name="Text 18"/>
+          <p:cNvPr id="18" name="Text 16"/>
           <p:cNvSpPr txBox="1"/>
           <p:nvPr/>
         </p:nvSpPr>
@@ -5019,7 +4945,7 @@
       </p:sp>
       <p:sp>
         <p:nvSpPr>
-          <p:cNvPr id="22" name="Text 19"/>
+          <p:cNvPr id="19" name="Text 17"/>
           <p:cNvSpPr txBox="1"/>
           <p:nvPr/>
         </p:nvSpPr>
@@ -5058,7 +4984,7 @@
       </p:sp>
       <p:sp>
         <p:nvSpPr>
-          <p:cNvPr id="23" name="Text 20"/>
+          <p:cNvPr id="20" name="Text 18"/>
           <p:cNvSpPr txBox="1"/>
           <p:nvPr/>
         </p:nvSpPr>
@@ -5097,7 +5023,7 @@
       </p:sp>
       <p:sp>
         <p:nvSpPr>
-          <p:cNvPr id="24" name="Text 21"/>
+          <p:cNvPr id="21" name="Text 19"/>
           <p:cNvSpPr txBox="1"/>
           <p:nvPr/>
         </p:nvSpPr>
@@ -5136,7 +5062,7 @@
       </p:sp>
       <p:sp>
         <p:nvSpPr>
-          <p:cNvPr id="25" name="Text 22"/>
+          <p:cNvPr id="22" name="Text 20"/>
           <p:cNvSpPr txBox="1"/>
           <p:nvPr/>
         </p:nvSpPr>
@@ -5175,7 +5101,7 @@
       </p:sp>
       <p:sp>
         <p:nvSpPr>
-          <p:cNvPr id="26" name="Text 23"/>
+          <p:cNvPr id="23" name="Text 21"/>
           <p:cNvSpPr txBox="1"/>
           <p:nvPr/>
         </p:nvSpPr>
@@ -5214,7 +5140,7 @@
       </p:sp>
       <p:sp>
         <p:nvSpPr>
-          <p:cNvPr id="27" name="Text 24"/>
+          <p:cNvPr id="24" name="Text 22"/>
           <p:cNvSpPr txBox="1"/>
           <p:nvPr/>
         </p:nvSpPr>
@@ -5253,7 +5179,7 @@
       </p:sp>
       <p:sp>
         <p:nvSpPr>
-          <p:cNvPr id="28" name="Shape 25"/>
+          <p:cNvPr id="25" name="Shape 23"/>
           <p:cNvSpPr/>
           <p:nvPr/>
         </p:nvSpPr>
@@ -5278,7 +5204,7 @@
       </p:sp>
       <p:sp>
         <p:nvSpPr>
-          <p:cNvPr id="29" name="Text 26"/>
+          <p:cNvPr id="26" name="Text 24"/>
           <p:cNvSpPr txBox="1"/>
           <p:nvPr/>
         </p:nvSpPr>
@@ -5326,6 +5252,54 @@
               <a:t>the homes paying with other wallets, splitting with friends or shopping early, found by the apps they use and reached on 115MM CTV households.</a:t>
             </a:r>
             <a:endParaRPr lang="en-US" sz="950" dirty="0"/>
+          </a:p>
+        </p:txBody>
+      </p:sp>
+      <p:sp>
+        <p:nvSpPr>
+          <p:cNvPr id="25" name="Slide Number Placeholder 0"/>
+          <p:cNvSpPr>
+            <a:spLocks noGrp="1"/>
+          </p:cNvSpPr>
+          <p:nvPr>
+            <p:ph type="sldNum" sz="quarter" idx="4294967295"/>
+          </p:nvPr>
+        </p:nvSpPr>
+        <p:spPr>
+          <a:xfrm>
+            <a:off x="457200" y="4832604"/>
+            <a:ext cx="365760" cy="182880"/>
+          </a:xfrm>
+          <a:prstGeom prst="rect">
+            <a:avLst/>
+          </a:prstGeom>
+          <a:extLst>
+            <a:ext uri="{C572A759-6A51-4108-AA02-DFA0A04FC94B}">
+              <ma14:wrappingTextBoxFlag xmlns:ma14="http://schemas.microsoft.com/office/mac/drawingml/2011/main" val="0"/>
+            </a:ext>
+          </a:extLst>
+        </p:spPr>
+        <p:txBody>
+          <a:bodyPr lIns="0" tIns="0" rIns="0" bIns="0"/>
+          <a:lstStyle>
+            <a:lvl1pPr>
+              <a:defRPr sz="800">
+                <a:solidFill>
+                  <a:srgbClr val="7E7E7E"/>
+                </a:solidFill>
+                <a:latin typeface="Poppins SemiBold"/>
+                <a:ea typeface="Poppins SemiBold"/>
+                <a:cs typeface="Poppins SemiBold"/>
+              </a:defRPr>
+            </a:lvl1pPr>
+          </a:lstStyle>
+          <a:p>
+            <a:pPr algn="l"/>
+            <a:fld id="{F7021451-1387-4CA6-816F-3879F97B5CBC}" type="slidenum">
+              <a:rPr b="0" lang="en-US"/>
+              <a:t>4</a:t>
+            </a:fld>
+            <a:endParaRPr lang="en-US"/>
           </a:p>
         </p:txBody>
       </p:sp>
@@ -5340,13 +5314,6 @@
 <file path=ppt/slides/slide5.xml><?xml version="1.0" encoding="utf-8"?>
 <p:sld xmlns:a="http://schemas.openxmlformats.org/drawingml/2006/main" xmlns:r="http://schemas.openxmlformats.org/officeDocument/2006/relationships" xmlns:p="http://schemas.openxmlformats.org/presentationml/2006/main">
   <p:cSld name="Slide 5">
-    <p:bg>
-      <p:bgPr>
-        <a:solidFill>
-          <a:srgbClr val="1A1A1A"/>
-        </a:solidFill>
-      </p:bgPr>
-    </p:bg>
     <p:spTree>
       <p:nvGrpSpPr>
         <p:cNvPr id="1" name=""/>
@@ -5480,109 +5447,7 @@
       </p:sp>
       <p:sp>
         <p:nvSpPr>
-          <p:cNvPr id="5" name="Text 3"/>
-          <p:cNvSpPr txBox="1"/>
-          <p:nvPr/>
-        </p:nvSpPr>
-        <p:spPr>
-          <a:xfrm>
-            <a:off x="457200" y="4832604"/>
-            <a:ext cx="365760" cy="182880"/>
-          </a:xfrm>
-          <a:prstGeom prst="rect">
-            <a:avLst/>
-          </a:prstGeom>
-          <a:noFill/>
-          <a:ln/>
-        </p:spPr>
-        <p:txBody>
-          <a:bodyPr wrap="square" lIns="0" tIns="0" rIns="0" bIns="0" rtlCol="0" anchor="t"/>
-          <a:lstStyle/>
-          <a:p>
-            <a:pPr indent="0" marL="0">
-              <a:buNone/>
-            </a:pPr>
-            <a:r>
-              <a:rPr lang="en-US" sz="800" dirty="0">
-                <a:solidFill>
-                  <a:srgbClr val="7E7E7E"/>
-                </a:solidFill>
-                <a:latin typeface="Poppins SemiBold" pitchFamily="34" charset="0"/>
-                <a:ea typeface="Poppins SemiBold" pitchFamily="34" charset="-122"/>
-                <a:cs typeface="Poppins SemiBold" pitchFamily="34" charset="-120"/>
-              </a:rPr>
-              <a:t>5</a:t>
-            </a:r>
-            <a:endParaRPr lang="en-US" sz="800" dirty="0"/>
-          </a:p>
-        </p:txBody>
-      </p:sp>
-      <p:sp>
-        <p:nvSpPr>
-          <p:cNvPr id="6" name="Text 4"/>
-          <p:cNvSpPr txBox="1"/>
-          <p:nvPr/>
-        </p:nvSpPr>
-        <p:spPr>
-          <a:xfrm>
-            <a:off x="868680" y="4832604"/>
-            <a:ext cx="5486400" cy="182880"/>
-          </a:xfrm>
-          <a:prstGeom prst="rect">
-            <a:avLst/>
-          </a:prstGeom>
-          <a:noFill/>
-          <a:ln/>
-        </p:spPr>
-        <p:txBody>
-          <a:bodyPr wrap="square" lIns="0" tIns="0" rIns="0" bIns="0" rtlCol="0" anchor="t"/>
-          <a:lstStyle/>
-          <a:p>
-            <a:pPr indent="0" marL="0">
-              <a:buNone/>
-            </a:pPr>
-            <a:r>
-              <a:rPr lang="en-US" sz="700" dirty="0">
-                <a:solidFill>
-                  <a:srgbClr val="7E7E7E"/>
-                </a:solidFill>
-                <a:latin typeface="Poppins" pitchFamily="34" charset="0"/>
-                <a:ea typeface="Poppins" pitchFamily="34" charset="-122"/>
-                <a:cs typeface="Poppins" pitchFamily="34" charset="-120"/>
-              </a:rPr>
-              <a:t>Sabio × PayPal  ·  Proactive point of view for Zenith  ·  Confidential</a:t>
-            </a:r>
-            <a:endParaRPr lang="en-US" sz="700" dirty="0"/>
-          </a:p>
-        </p:txBody>
-      </p:sp>
-      <p:pic>
-        <p:nvPicPr>
-          <p:cNvPr id="7" name="Image 0" descr="/home/claude/benjaminbring-cloud/sabio-deck-builders-/assets/sabio-logo-white-sm.png">    </p:cNvPr>
-          <p:cNvPicPr>
-            <a:picLocks noChangeAspect="1"/>
-          </p:cNvPicPr>
-          <p:nvPr/>
-        </p:nvPicPr>
-        <p:blipFill>
-          <a:blip r:embed="rId1"/>
-          <a:stretch>
-            <a:fillRect/>
-          </a:stretch>
-        </p:blipFill>
-        <p:spPr>
-          <a:xfrm>
-            <a:off x="8028432" y="4805172"/>
-            <a:ext cx="647572" cy="155448"/>
-          </a:xfrm>
-          <a:prstGeom prst="rect">
-            <a:avLst/>
-          </a:prstGeom>
-        </p:spPr>
-      </p:pic>
-      <p:sp>
-        <p:nvSpPr>
-          <p:cNvPr id="8" name="Shape 5"/>
+          <p:cNvPr id="5" name="Shape 3"/>
           <p:cNvSpPr/>
           <p:nvPr/>
         </p:nvSpPr>
@@ -5607,7 +5472,7 @@
       </p:sp>
       <p:sp>
         <p:nvSpPr>
-          <p:cNvPr id="9" name="Text 6"/>
+          <p:cNvPr id="6" name="Text 4"/>
           <p:cNvSpPr txBox="1"/>
           <p:nvPr/>
         </p:nvSpPr>
@@ -5646,7 +5511,7 @@
       </p:sp>
       <p:sp>
         <p:nvSpPr>
-          <p:cNvPr id="10" name="Text 7"/>
+          <p:cNvPr id="7" name="Text 5"/>
           <p:cNvSpPr txBox="1"/>
           <p:nvPr/>
         </p:nvSpPr>
@@ -5685,7 +5550,7 @@
       </p:sp>
       <p:sp>
         <p:nvSpPr>
-          <p:cNvPr id="11" name="Text 8"/>
+          <p:cNvPr id="8" name="Text 6"/>
           <p:cNvSpPr txBox="1"/>
           <p:nvPr/>
         </p:nvSpPr>
@@ -5724,7 +5589,7 @@
       </p:sp>
       <p:sp>
         <p:nvSpPr>
-          <p:cNvPr id="12" name="Text 9"/>
+          <p:cNvPr id="9" name="Text 7"/>
           <p:cNvSpPr txBox="1"/>
           <p:nvPr/>
         </p:nvSpPr>
@@ -5763,7 +5628,7 @@
       </p:sp>
       <p:sp>
         <p:nvSpPr>
-          <p:cNvPr id="13" name="Text 10"/>
+          <p:cNvPr id="10" name="Text 8"/>
           <p:cNvSpPr txBox="1"/>
           <p:nvPr/>
         </p:nvSpPr>
@@ -5802,7 +5667,7 @@
       </p:sp>
       <p:sp>
         <p:nvSpPr>
-          <p:cNvPr id="14" name="Text 11"/>
+          <p:cNvPr id="11" name="Text 9"/>
           <p:cNvSpPr txBox="1"/>
           <p:nvPr/>
         </p:nvSpPr>
@@ -5841,7 +5706,7 @@
       </p:sp>
       <p:sp>
         <p:nvSpPr>
-          <p:cNvPr id="15" name="Shape 12"/>
+          <p:cNvPr id="12" name="Shape 10"/>
           <p:cNvSpPr/>
           <p:nvPr/>
         </p:nvSpPr>
@@ -5866,7 +5731,7 @@
       </p:sp>
       <p:sp>
         <p:nvSpPr>
-          <p:cNvPr id="16" name="Text 13"/>
+          <p:cNvPr id="13" name="Text 11"/>
           <p:cNvSpPr txBox="1"/>
           <p:nvPr/>
         </p:nvSpPr>
@@ -5905,7 +5770,7 @@
       </p:sp>
       <p:sp>
         <p:nvSpPr>
-          <p:cNvPr id="17" name="Text 14"/>
+          <p:cNvPr id="14" name="Text 12"/>
           <p:cNvSpPr txBox="1"/>
           <p:nvPr/>
         </p:nvSpPr>
@@ -5944,7 +5809,7 @@
       </p:sp>
       <p:sp>
         <p:nvSpPr>
-          <p:cNvPr id="18" name="Shape 15"/>
+          <p:cNvPr id="15" name="Shape 13"/>
           <p:cNvSpPr/>
           <p:nvPr/>
         </p:nvSpPr>
@@ -5969,7 +5834,7 @@
       </p:sp>
       <p:sp>
         <p:nvSpPr>
-          <p:cNvPr id="19" name="Text 16"/>
+          <p:cNvPr id="16" name="Text 14"/>
           <p:cNvSpPr txBox="1"/>
           <p:nvPr/>
         </p:nvSpPr>
@@ -6008,7 +5873,7 @@
       </p:sp>
       <p:sp>
         <p:nvSpPr>
-          <p:cNvPr id="20" name="Text 17"/>
+          <p:cNvPr id="17" name="Text 15"/>
           <p:cNvSpPr txBox="1"/>
           <p:nvPr/>
         </p:nvSpPr>
@@ -6047,7 +5912,7 @@
       </p:sp>
       <p:sp>
         <p:nvSpPr>
-          <p:cNvPr id="21" name="Text 18"/>
+          <p:cNvPr id="18" name="Text 16"/>
           <p:cNvSpPr txBox="1"/>
           <p:nvPr/>
         </p:nvSpPr>
@@ -6086,7 +5951,7 @@
       </p:sp>
       <p:sp>
         <p:nvSpPr>
-          <p:cNvPr id="22" name="Text 19"/>
+          <p:cNvPr id="19" name="Text 17"/>
           <p:cNvSpPr txBox="1"/>
           <p:nvPr/>
         </p:nvSpPr>
@@ -6125,7 +5990,7 @@
       </p:sp>
       <p:sp>
         <p:nvSpPr>
-          <p:cNvPr id="23" name="Text 20"/>
+          <p:cNvPr id="20" name="Text 18"/>
           <p:cNvSpPr txBox="1"/>
           <p:nvPr/>
         </p:nvSpPr>
@@ -6164,7 +6029,7 @@
       </p:sp>
       <p:sp>
         <p:nvSpPr>
-          <p:cNvPr id="24" name="Text 21"/>
+          <p:cNvPr id="21" name="Text 19"/>
           <p:cNvSpPr txBox="1"/>
           <p:nvPr/>
         </p:nvSpPr>
@@ -6203,7 +6068,7 @@
       </p:sp>
       <p:sp>
         <p:nvSpPr>
-          <p:cNvPr id="25" name="Shape 22"/>
+          <p:cNvPr id="22" name="Shape 20"/>
           <p:cNvSpPr/>
           <p:nvPr/>
         </p:nvSpPr>
@@ -6228,7 +6093,7 @@
       </p:sp>
       <p:sp>
         <p:nvSpPr>
-          <p:cNvPr id="26" name="Text 23"/>
+          <p:cNvPr id="23" name="Text 21"/>
           <p:cNvSpPr txBox="1"/>
           <p:nvPr/>
         </p:nvSpPr>
@@ -6267,7 +6132,7 @@
       </p:sp>
       <p:sp>
         <p:nvSpPr>
-          <p:cNvPr id="27" name="Text 24"/>
+          <p:cNvPr id="24" name="Text 22"/>
           <p:cNvSpPr txBox="1"/>
           <p:nvPr/>
         </p:nvSpPr>
@@ -6306,7 +6171,7 @@
       </p:sp>
       <p:sp>
         <p:nvSpPr>
-          <p:cNvPr id="28" name="Shape 25"/>
+          <p:cNvPr id="25" name="Shape 23"/>
           <p:cNvSpPr/>
           <p:nvPr/>
         </p:nvSpPr>
@@ -6331,7 +6196,7 @@
       </p:sp>
       <p:sp>
         <p:nvSpPr>
-          <p:cNvPr id="29" name="Text 26"/>
+          <p:cNvPr id="26" name="Text 24"/>
           <p:cNvSpPr txBox="1"/>
           <p:nvPr/>
         </p:nvSpPr>
@@ -6370,7 +6235,7 @@
       </p:sp>
       <p:sp>
         <p:nvSpPr>
-          <p:cNvPr id="30" name="Text 27"/>
+          <p:cNvPr id="27" name="Text 25"/>
           <p:cNvSpPr txBox="1"/>
           <p:nvPr/>
         </p:nvSpPr>
@@ -6409,7 +6274,7 @@
       </p:sp>
       <p:sp>
         <p:nvSpPr>
-          <p:cNvPr id="31" name="Text 28"/>
+          <p:cNvPr id="28" name="Text 26"/>
           <p:cNvSpPr txBox="1"/>
           <p:nvPr/>
         </p:nvSpPr>
@@ -6448,7 +6313,7 @@
       </p:sp>
       <p:sp>
         <p:nvSpPr>
-          <p:cNvPr id="32" name="Text 29"/>
+          <p:cNvPr id="29" name="Text 27"/>
           <p:cNvSpPr txBox="1"/>
           <p:nvPr/>
         </p:nvSpPr>
@@ -6487,7 +6352,7 @@
       </p:sp>
       <p:sp>
         <p:nvSpPr>
-          <p:cNvPr id="33" name="Text 30"/>
+          <p:cNvPr id="30" name="Text 28"/>
           <p:cNvSpPr txBox="1"/>
           <p:nvPr/>
         </p:nvSpPr>
@@ -6526,7 +6391,7 @@
       </p:sp>
       <p:sp>
         <p:nvSpPr>
-          <p:cNvPr id="34" name="Text 31"/>
+          <p:cNvPr id="31" name="Text 29"/>
           <p:cNvSpPr txBox="1"/>
           <p:nvPr/>
         </p:nvSpPr>
@@ -6565,7 +6430,7 @@
       </p:sp>
       <p:sp>
         <p:nvSpPr>
-          <p:cNvPr id="35" name="Shape 32"/>
+          <p:cNvPr id="32" name="Shape 30"/>
           <p:cNvSpPr/>
           <p:nvPr/>
         </p:nvSpPr>
@@ -6590,7 +6455,7 @@
       </p:sp>
       <p:sp>
         <p:nvSpPr>
-          <p:cNvPr id="36" name="Text 33"/>
+          <p:cNvPr id="33" name="Text 31"/>
           <p:cNvSpPr txBox="1"/>
           <p:nvPr/>
         </p:nvSpPr>
@@ -6629,7 +6494,7 @@
       </p:sp>
       <p:sp>
         <p:nvSpPr>
-          <p:cNvPr id="37" name="Text 34"/>
+          <p:cNvPr id="34" name="Text 32"/>
           <p:cNvSpPr txBox="1"/>
           <p:nvPr/>
         </p:nvSpPr>
@@ -6663,6 +6528,54 @@
               <a:t>Sized at build [CONFIRM]</a:t>
             </a:r>
             <a:endParaRPr lang="en-US" sz="800" dirty="0"/>
+          </a:p>
+        </p:txBody>
+      </p:sp>
+      <p:sp>
+        <p:nvSpPr>
+          <p:cNvPr id="25" name="Slide Number Placeholder 0"/>
+          <p:cNvSpPr>
+            <a:spLocks noGrp="1"/>
+          </p:cNvSpPr>
+          <p:nvPr>
+            <p:ph type="sldNum" sz="quarter" idx="4294967295"/>
+          </p:nvPr>
+        </p:nvSpPr>
+        <p:spPr>
+          <a:xfrm>
+            <a:off x="457200" y="4832604"/>
+            <a:ext cx="365760" cy="182880"/>
+          </a:xfrm>
+          <a:prstGeom prst="rect">
+            <a:avLst/>
+          </a:prstGeom>
+          <a:extLst>
+            <a:ext uri="{C572A759-6A51-4108-AA02-DFA0A04FC94B}">
+              <ma14:wrappingTextBoxFlag xmlns:ma14="http://schemas.microsoft.com/office/mac/drawingml/2011/main" val="0"/>
+            </a:ext>
+          </a:extLst>
+        </p:spPr>
+        <p:txBody>
+          <a:bodyPr lIns="0" tIns="0" rIns="0" bIns="0"/>
+          <a:lstStyle>
+            <a:lvl1pPr>
+              <a:defRPr sz="800">
+                <a:solidFill>
+                  <a:srgbClr val="7E7E7E"/>
+                </a:solidFill>
+                <a:latin typeface="Poppins SemiBold"/>
+                <a:ea typeface="Poppins SemiBold"/>
+                <a:cs typeface="Poppins SemiBold"/>
+              </a:defRPr>
+            </a:lvl1pPr>
+          </a:lstStyle>
+          <a:p>
+            <a:pPr algn="l"/>
+            <a:fld id="{F7021451-1387-4CA6-816F-3879F97B5CBC}" type="slidenum">
+              <a:rPr b="0" lang="en-US"/>
+              <a:t>5</a:t>
+            </a:fld>
+            <a:endParaRPr lang="en-US"/>
           </a:p>
         </p:txBody>
       </p:sp>
@@ -6677,13 +6590,6 @@
 <file path=ppt/slides/slide6.xml><?xml version="1.0" encoding="utf-8"?>
 <p:sld xmlns:a="http://schemas.openxmlformats.org/drawingml/2006/main" xmlns:r="http://schemas.openxmlformats.org/officeDocument/2006/relationships" xmlns:p="http://schemas.openxmlformats.org/presentationml/2006/main">
   <p:cSld name="Slide 6">
-    <p:bg>
-      <p:bgPr>
-        <a:solidFill>
-          <a:srgbClr val="1A1A1A"/>
-        </a:solidFill>
-      </p:bgPr>
-    </p:bg>
     <p:spTree>
       <p:nvGrpSpPr>
         <p:cNvPr id="1" name=""/>
@@ -6817,109 +6723,7 @@
       </p:sp>
       <p:sp>
         <p:nvSpPr>
-          <p:cNvPr id="5" name="Text 3"/>
-          <p:cNvSpPr txBox="1"/>
-          <p:nvPr/>
-        </p:nvSpPr>
-        <p:spPr>
-          <a:xfrm>
-            <a:off x="457200" y="4832604"/>
-            <a:ext cx="365760" cy="182880"/>
-          </a:xfrm>
-          <a:prstGeom prst="rect">
-            <a:avLst/>
-          </a:prstGeom>
-          <a:noFill/>
-          <a:ln/>
-        </p:spPr>
-        <p:txBody>
-          <a:bodyPr wrap="square" lIns="0" tIns="0" rIns="0" bIns="0" rtlCol="0" anchor="t"/>
-          <a:lstStyle/>
-          <a:p>
-            <a:pPr indent="0" marL="0">
-              <a:buNone/>
-            </a:pPr>
-            <a:r>
-              <a:rPr lang="en-US" sz="800" dirty="0">
-                <a:solidFill>
-                  <a:srgbClr val="7E7E7E"/>
-                </a:solidFill>
-                <a:latin typeface="Poppins SemiBold" pitchFamily="34" charset="0"/>
-                <a:ea typeface="Poppins SemiBold" pitchFamily="34" charset="-122"/>
-                <a:cs typeface="Poppins SemiBold" pitchFamily="34" charset="-120"/>
-              </a:rPr>
-              <a:t>6</a:t>
-            </a:r>
-            <a:endParaRPr lang="en-US" sz="800" dirty="0"/>
-          </a:p>
-        </p:txBody>
-      </p:sp>
-      <p:sp>
-        <p:nvSpPr>
-          <p:cNvPr id="6" name="Text 4"/>
-          <p:cNvSpPr txBox="1"/>
-          <p:nvPr/>
-        </p:nvSpPr>
-        <p:spPr>
-          <a:xfrm>
-            <a:off x="868680" y="4832604"/>
-            <a:ext cx="5486400" cy="182880"/>
-          </a:xfrm>
-          <a:prstGeom prst="rect">
-            <a:avLst/>
-          </a:prstGeom>
-          <a:noFill/>
-          <a:ln/>
-        </p:spPr>
-        <p:txBody>
-          <a:bodyPr wrap="square" lIns="0" tIns="0" rIns="0" bIns="0" rtlCol="0" anchor="t"/>
-          <a:lstStyle/>
-          <a:p>
-            <a:pPr indent="0" marL="0">
-              <a:buNone/>
-            </a:pPr>
-            <a:r>
-              <a:rPr lang="en-US" sz="700" dirty="0">
-                <a:solidFill>
-                  <a:srgbClr val="7E7E7E"/>
-                </a:solidFill>
-                <a:latin typeface="Poppins" pitchFamily="34" charset="0"/>
-                <a:ea typeface="Poppins" pitchFamily="34" charset="-122"/>
-                <a:cs typeface="Poppins" pitchFamily="34" charset="-120"/>
-              </a:rPr>
-              <a:t>Sabio × PayPal  ·  Proactive point of view for Zenith  ·  Confidential</a:t>
-            </a:r>
-            <a:endParaRPr lang="en-US" sz="700" dirty="0"/>
-          </a:p>
-        </p:txBody>
-      </p:sp>
-      <p:pic>
-        <p:nvPicPr>
-          <p:cNvPr id="7" name="Image 0" descr="/home/claude/benjaminbring-cloud/sabio-deck-builders-/assets/sabio-logo-white-sm.png">    </p:cNvPr>
-          <p:cNvPicPr>
-            <a:picLocks noChangeAspect="1"/>
-          </p:cNvPicPr>
-          <p:nvPr/>
-        </p:nvPicPr>
-        <p:blipFill>
-          <a:blip r:embed="rId1"/>
-          <a:stretch>
-            <a:fillRect/>
-          </a:stretch>
-        </p:blipFill>
-        <p:spPr>
-          <a:xfrm>
-            <a:off x="8028432" y="4805172"/>
-            <a:ext cx="647572" cy="155448"/>
-          </a:xfrm>
-          <a:prstGeom prst="rect">
-            <a:avLst/>
-          </a:prstGeom>
-        </p:spPr>
-      </p:pic>
-      <p:sp>
-        <p:nvSpPr>
-          <p:cNvPr id="8" name="Shape 5"/>
+          <p:cNvPr id="5" name="Shape 3"/>
           <p:cNvSpPr/>
           <p:nvPr/>
         </p:nvSpPr>
@@ -6944,7 +6748,7 @@
       </p:sp>
       <p:sp>
         <p:nvSpPr>
-          <p:cNvPr id="9" name="Text 6"/>
+          <p:cNvPr id="6" name="Text 4"/>
           <p:cNvSpPr txBox="1"/>
           <p:nvPr/>
         </p:nvSpPr>
@@ -6983,7 +6787,7 @@
       </p:sp>
       <p:sp>
         <p:nvSpPr>
-          <p:cNvPr id="10" name="Text 7"/>
+          <p:cNvPr id="7" name="Text 5"/>
           <p:cNvSpPr txBox="1"/>
           <p:nvPr/>
         </p:nvSpPr>
@@ -7022,7 +6826,7 @@
       </p:sp>
       <p:sp>
         <p:nvSpPr>
-          <p:cNvPr id="11" name="Shape 8"/>
+          <p:cNvPr id="8" name="Shape 6"/>
           <p:cNvSpPr/>
           <p:nvPr/>
         </p:nvSpPr>
@@ -7047,7 +6851,7 @@
       </p:sp>
       <p:sp>
         <p:nvSpPr>
-          <p:cNvPr id="12" name="Text 9"/>
+          <p:cNvPr id="9" name="Text 7"/>
           <p:cNvSpPr txBox="1"/>
           <p:nvPr/>
         </p:nvSpPr>
@@ -7086,7 +6890,7 @@
       </p:sp>
       <p:sp>
         <p:nvSpPr>
-          <p:cNvPr id="13" name="Text 10"/>
+          <p:cNvPr id="10" name="Text 8"/>
           <p:cNvSpPr txBox="1"/>
           <p:nvPr/>
         </p:nvSpPr>
@@ -7125,7 +6929,7 @@
       </p:sp>
       <p:sp>
         <p:nvSpPr>
-          <p:cNvPr id="14" name="Shape 11"/>
+          <p:cNvPr id="11" name="Shape 9"/>
           <p:cNvSpPr/>
           <p:nvPr/>
         </p:nvSpPr>
@@ -7150,7 +6954,7 @@
       </p:sp>
       <p:sp>
         <p:nvSpPr>
-          <p:cNvPr id="15" name="Text 12"/>
+          <p:cNvPr id="12" name="Text 10"/>
           <p:cNvSpPr txBox="1"/>
           <p:nvPr/>
         </p:nvSpPr>
@@ -7189,7 +6993,7 @@
       </p:sp>
       <p:sp>
         <p:nvSpPr>
-          <p:cNvPr id="16" name="Text 13"/>
+          <p:cNvPr id="13" name="Text 11"/>
           <p:cNvSpPr txBox="1"/>
           <p:nvPr/>
         </p:nvSpPr>
@@ -7228,7 +7032,7 @@
       </p:sp>
       <p:sp>
         <p:nvSpPr>
-          <p:cNvPr id="17" name="Shape 14"/>
+          <p:cNvPr id="14" name="Shape 12"/>
           <p:cNvSpPr/>
           <p:nvPr/>
         </p:nvSpPr>
@@ -7253,7 +7057,7 @@
       </p:sp>
       <p:sp>
         <p:nvSpPr>
-          <p:cNvPr id="18" name="Text 15"/>
+          <p:cNvPr id="15" name="Text 13"/>
           <p:cNvSpPr txBox="1"/>
           <p:nvPr/>
         </p:nvSpPr>
@@ -7292,7 +7096,7 @@
       </p:sp>
       <p:sp>
         <p:nvSpPr>
-          <p:cNvPr id="19" name="Text 16"/>
+          <p:cNvPr id="16" name="Text 14"/>
           <p:cNvSpPr txBox="1"/>
           <p:nvPr/>
         </p:nvSpPr>
@@ -7331,7 +7135,7 @@
       </p:sp>
       <p:sp>
         <p:nvSpPr>
-          <p:cNvPr id="20" name="Shape 17"/>
+          <p:cNvPr id="17" name="Shape 15"/>
           <p:cNvSpPr/>
           <p:nvPr/>
         </p:nvSpPr>
@@ -7356,7 +7160,7 @@
       </p:sp>
       <p:sp>
         <p:nvSpPr>
-          <p:cNvPr id="21" name="Text 18"/>
+          <p:cNvPr id="18" name="Text 16"/>
           <p:cNvSpPr txBox="1"/>
           <p:nvPr/>
         </p:nvSpPr>
@@ -7395,7 +7199,7 @@
       </p:sp>
       <p:sp>
         <p:nvSpPr>
-          <p:cNvPr id="22" name="Text 19"/>
+          <p:cNvPr id="19" name="Text 17"/>
           <p:cNvSpPr txBox="1"/>
           <p:nvPr/>
         </p:nvSpPr>
@@ -7517,6 +7321,54 @@
               <a:t>Lift read on the same graph we target</a:t>
             </a:r>
             <a:endParaRPr lang="en-US" sz="950" dirty="0"/>
+          </a:p>
+        </p:txBody>
+      </p:sp>
+      <p:sp>
+        <p:nvSpPr>
+          <p:cNvPr id="25" name="Slide Number Placeholder 0"/>
+          <p:cNvSpPr>
+            <a:spLocks noGrp="1"/>
+          </p:cNvSpPr>
+          <p:nvPr>
+            <p:ph type="sldNum" sz="quarter" idx="4294967295"/>
+          </p:nvPr>
+        </p:nvSpPr>
+        <p:spPr>
+          <a:xfrm>
+            <a:off x="457200" y="4832604"/>
+            <a:ext cx="365760" cy="182880"/>
+          </a:xfrm>
+          <a:prstGeom prst="rect">
+            <a:avLst/>
+          </a:prstGeom>
+          <a:extLst>
+            <a:ext uri="{C572A759-6A51-4108-AA02-DFA0A04FC94B}">
+              <ma14:wrappingTextBoxFlag xmlns:ma14="http://schemas.microsoft.com/office/mac/drawingml/2011/main" val="0"/>
+            </a:ext>
+          </a:extLst>
+        </p:spPr>
+        <p:txBody>
+          <a:bodyPr lIns="0" tIns="0" rIns="0" bIns="0"/>
+          <a:lstStyle>
+            <a:lvl1pPr>
+              <a:defRPr sz="800">
+                <a:solidFill>
+                  <a:srgbClr val="7E7E7E"/>
+                </a:solidFill>
+                <a:latin typeface="Poppins SemiBold"/>
+                <a:ea typeface="Poppins SemiBold"/>
+                <a:cs typeface="Poppins SemiBold"/>
+              </a:defRPr>
+            </a:lvl1pPr>
+          </a:lstStyle>
+          <a:p>
+            <a:pPr algn="l"/>
+            <a:fld id="{F7021451-1387-4CA6-816F-3879F97B5CBC}" type="slidenum">
+              <a:rPr b="0" lang="en-US"/>
+              <a:t>6</a:t>
+            </a:fld>
+            <a:endParaRPr lang="en-US"/>
           </a:p>
         </p:txBody>
       </p:sp>
@@ -7531,13 +7383,6 @@
 <file path=ppt/slides/slide7.xml><?xml version="1.0" encoding="utf-8"?>
 <p:sld xmlns:a="http://schemas.openxmlformats.org/drawingml/2006/main" xmlns:r="http://schemas.openxmlformats.org/officeDocument/2006/relationships" xmlns:p="http://schemas.openxmlformats.org/presentationml/2006/main">
   <p:cSld name="Slide 7">
-    <p:bg>
-      <p:bgPr>
-        <a:solidFill>
-          <a:srgbClr val="1A1A1A"/>
-        </a:solidFill>
-      </p:bgPr>
-    </p:bg>
     <p:spTree>
       <p:nvGrpSpPr>
         <p:cNvPr id="1" name=""/>
@@ -7671,109 +7516,7 @@
       </p:sp>
       <p:sp>
         <p:nvSpPr>
-          <p:cNvPr id="5" name="Text 3"/>
-          <p:cNvSpPr txBox="1"/>
-          <p:nvPr/>
-        </p:nvSpPr>
-        <p:spPr>
-          <a:xfrm>
-            <a:off x="457200" y="4832604"/>
-            <a:ext cx="365760" cy="182880"/>
-          </a:xfrm>
-          <a:prstGeom prst="rect">
-            <a:avLst/>
-          </a:prstGeom>
-          <a:noFill/>
-          <a:ln/>
-        </p:spPr>
-        <p:txBody>
-          <a:bodyPr wrap="square" lIns="0" tIns="0" rIns="0" bIns="0" rtlCol="0" anchor="t"/>
-          <a:lstStyle/>
-          <a:p>
-            <a:pPr indent="0" marL="0">
-              <a:buNone/>
-            </a:pPr>
-            <a:r>
-              <a:rPr lang="en-US" sz="800" dirty="0">
-                <a:solidFill>
-                  <a:srgbClr val="7E7E7E"/>
-                </a:solidFill>
-                <a:latin typeface="Poppins SemiBold" pitchFamily="34" charset="0"/>
-                <a:ea typeface="Poppins SemiBold" pitchFamily="34" charset="-122"/>
-                <a:cs typeface="Poppins SemiBold" pitchFamily="34" charset="-120"/>
-              </a:rPr>
-              <a:t>7</a:t>
-            </a:r>
-            <a:endParaRPr lang="en-US" sz="800" dirty="0"/>
-          </a:p>
-        </p:txBody>
-      </p:sp>
-      <p:sp>
-        <p:nvSpPr>
-          <p:cNvPr id="6" name="Text 4"/>
-          <p:cNvSpPr txBox="1"/>
-          <p:nvPr/>
-        </p:nvSpPr>
-        <p:spPr>
-          <a:xfrm>
-            <a:off x="868680" y="4832604"/>
-            <a:ext cx="5486400" cy="182880"/>
-          </a:xfrm>
-          <a:prstGeom prst="rect">
-            <a:avLst/>
-          </a:prstGeom>
-          <a:noFill/>
-          <a:ln/>
-        </p:spPr>
-        <p:txBody>
-          <a:bodyPr wrap="square" lIns="0" tIns="0" rIns="0" bIns="0" rtlCol="0" anchor="t"/>
-          <a:lstStyle/>
-          <a:p>
-            <a:pPr indent="0" marL="0">
-              <a:buNone/>
-            </a:pPr>
-            <a:r>
-              <a:rPr lang="en-US" sz="700" dirty="0">
-                <a:solidFill>
-                  <a:srgbClr val="7E7E7E"/>
-                </a:solidFill>
-                <a:latin typeface="Poppins" pitchFamily="34" charset="0"/>
-                <a:ea typeface="Poppins" pitchFamily="34" charset="-122"/>
-                <a:cs typeface="Poppins" pitchFamily="34" charset="-120"/>
-              </a:rPr>
-              <a:t>Sabio × PayPal  ·  Proactive point of view for Zenith  ·  Confidential</a:t>
-            </a:r>
-            <a:endParaRPr lang="en-US" sz="700" dirty="0"/>
-          </a:p>
-        </p:txBody>
-      </p:sp>
-      <p:pic>
-        <p:nvPicPr>
-          <p:cNvPr id="7" name="Image 0" descr="/home/claude/benjaminbring-cloud/sabio-deck-builders-/assets/sabio-logo-white-sm.png">    </p:cNvPr>
-          <p:cNvPicPr>
-            <a:picLocks noChangeAspect="1"/>
-          </p:cNvPicPr>
-          <p:nvPr/>
-        </p:nvPicPr>
-        <p:blipFill>
-          <a:blip r:embed="rId1"/>
-          <a:stretch>
-            <a:fillRect/>
-          </a:stretch>
-        </p:blipFill>
-        <p:spPr>
-          <a:xfrm>
-            <a:off x="8028432" y="4805172"/>
-            <a:ext cx="647572" cy="155448"/>
-          </a:xfrm>
-          <a:prstGeom prst="rect">
-            <a:avLst/>
-          </a:prstGeom>
-        </p:spPr>
-      </p:pic>
-      <p:sp>
-        <p:nvSpPr>
-          <p:cNvPr id="8" name="Shape 5"/>
+          <p:cNvPr id="5" name="Shape 3"/>
           <p:cNvSpPr/>
           <p:nvPr/>
         </p:nvSpPr>
@@ -7798,7 +7541,7 @@
       </p:sp>
       <p:sp>
         <p:nvSpPr>
-          <p:cNvPr id="9" name="Text 6"/>
+          <p:cNvPr id="6" name="Text 4"/>
           <p:cNvSpPr txBox="1"/>
           <p:nvPr/>
         </p:nvSpPr>
@@ -7837,7 +7580,7 @@
       </p:sp>
       <p:sp>
         <p:nvSpPr>
-          <p:cNvPr id="10" name="Text 7"/>
+          <p:cNvPr id="7" name="Text 5"/>
           <p:cNvSpPr txBox="1"/>
           <p:nvPr/>
         </p:nvSpPr>
@@ -7876,7 +7619,7 @@
       </p:sp>
       <p:sp>
         <p:nvSpPr>
-          <p:cNvPr id="11" name="Shape 8"/>
+          <p:cNvPr id="8" name="Shape 6"/>
           <p:cNvSpPr/>
           <p:nvPr/>
         </p:nvSpPr>
@@ -7901,7 +7644,7 @@
       </p:sp>
       <p:sp>
         <p:nvSpPr>
-          <p:cNvPr id="12" name="Text 9"/>
+          <p:cNvPr id="9" name="Text 7"/>
           <p:cNvSpPr txBox="1"/>
           <p:nvPr/>
         </p:nvSpPr>
@@ -7940,7 +7683,7 @@
       </p:sp>
       <p:sp>
         <p:nvSpPr>
-          <p:cNvPr id="13" name="Text 10"/>
+          <p:cNvPr id="10" name="Text 8"/>
           <p:cNvSpPr txBox="1"/>
           <p:nvPr/>
         </p:nvSpPr>
@@ -7979,7 +7722,7 @@
       </p:sp>
       <p:sp>
         <p:nvSpPr>
-          <p:cNvPr id="14" name="Shape 11"/>
+          <p:cNvPr id="11" name="Shape 9"/>
           <p:cNvSpPr/>
           <p:nvPr/>
         </p:nvSpPr>
@@ -8004,7 +7747,7 @@
       </p:sp>
       <p:sp>
         <p:nvSpPr>
-          <p:cNvPr id="15" name="Text 12"/>
+          <p:cNvPr id="12" name="Text 10"/>
           <p:cNvSpPr txBox="1"/>
           <p:nvPr/>
         </p:nvSpPr>
@@ -8043,7 +7786,7 @@
       </p:sp>
       <p:sp>
         <p:nvSpPr>
-          <p:cNvPr id="16" name="Text 13"/>
+          <p:cNvPr id="13" name="Text 11"/>
           <p:cNvSpPr txBox="1"/>
           <p:nvPr/>
         </p:nvSpPr>
@@ -8082,7 +7825,7 @@
       </p:sp>
       <p:sp>
         <p:nvSpPr>
-          <p:cNvPr id="17" name="Shape 14"/>
+          <p:cNvPr id="14" name="Shape 12"/>
           <p:cNvSpPr/>
           <p:nvPr/>
         </p:nvSpPr>
@@ -8107,7 +7850,7 @@
       </p:sp>
       <p:sp>
         <p:nvSpPr>
-          <p:cNvPr id="18" name="Text 15"/>
+          <p:cNvPr id="15" name="Text 13"/>
           <p:cNvSpPr txBox="1"/>
           <p:nvPr/>
         </p:nvSpPr>
@@ -8146,7 +7889,7 @@
       </p:sp>
       <p:sp>
         <p:nvSpPr>
-          <p:cNvPr id="19" name="Text 16"/>
+          <p:cNvPr id="16" name="Text 14"/>
           <p:cNvSpPr txBox="1"/>
           <p:nvPr/>
         </p:nvSpPr>
@@ -8185,7 +7928,7 @@
       </p:sp>
       <p:sp>
         <p:nvSpPr>
-          <p:cNvPr id="20" name="Shape 17"/>
+          <p:cNvPr id="17" name="Shape 15"/>
           <p:cNvSpPr/>
           <p:nvPr/>
         </p:nvSpPr>
@@ -8210,7 +7953,7 @@
       </p:sp>
       <p:sp>
         <p:nvSpPr>
-          <p:cNvPr id="21" name="Text 18"/>
+          <p:cNvPr id="18" name="Text 16"/>
           <p:cNvSpPr txBox="1"/>
           <p:nvPr/>
         </p:nvSpPr>
@@ -8249,7 +7992,7 @@
       </p:sp>
       <p:sp>
         <p:nvSpPr>
-          <p:cNvPr id="22" name="Text 19"/>
+          <p:cNvPr id="19" name="Text 17"/>
           <p:cNvSpPr txBox="1"/>
           <p:nvPr/>
         </p:nvSpPr>
@@ -8288,7 +8031,7 @@
       </p:sp>
       <p:sp>
         <p:nvSpPr>
-          <p:cNvPr id="23" name="Shape 20"/>
+          <p:cNvPr id="20" name="Shape 18"/>
           <p:cNvSpPr/>
           <p:nvPr/>
         </p:nvSpPr>
@@ -8313,7 +8056,7 @@
       </p:sp>
       <p:sp>
         <p:nvSpPr>
-          <p:cNvPr id="24" name="Text 21"/>
+          <p:cNvPr id="21" name="Text 19"/>
           <p:cNvSpPr txBox="1"/>
           <p:nvPr/>
         </p:nvSpPr>
@@ -8352,7 +8095,7 @@
       </p:sp>
       <p:sp>
         <p:nvSpPr>
-          <p:cNvPr id="25" name="Text 22"/>
+          <p:cNvPr id="22" name="Text 20"/>
           <p:cNvSpPr txBox="1"/>
           <p:nvPr/>
         </p:nvSpPr>
@@ -8386,6 +8129,54 @@
               <a:t>Sabio is minority-owned, so this spend counts toward PayPal and Publicis supplier diversity goals.</a:t>
             </a:r>
             <a:endParaRPr lang="en-US" sz="850" dirty="0"/>
+          </a:p>
+        </p:txBody>
+      </p:sp>
+      <p:sp>
+        <p:nvSpPr>
+          <p:cNvPr id="25" name="Slide Number Placeholder 0"/>
+          <p:cNvSpPr>
+            <a:spLocks noGrp="1"/>
+          </p:cNvSpPr>
+          <p:nvPr>
+            <p:ph type="sldNum" sz="quarter" idx="4294967295"/>
+          </p:nvPr>
+        </p:nvSpPr>
+        <p:spPr>
+          <a:xfrm>
+            <a:off x="457200" y="4832604"/>
+            <a:ext cx="365760" cy="182880"/>
+          </a:xfrm>
+          <a:prstGeom prst="rect">
+            <a:avLst/>
+          </a:prstGeom>
+          <a:extLst>
+            <a:ext uri="{C572A759-6A51-4108-AA02-DFA0A04FC94B}">
+              <ma14:wrappingTextBoxFlag xmlns:ma14="http://schemas.microsoft.com/office/mac/drawingml/2011/main" val="0"/>
+            </a:ext>
+          </a:extLst>
+        </p:spPr>
+        <p:txBody>
+          <a:bodyPr lIns="0" tIns="0" rIns="0" bIns="0"/>
+          <a:lstStyle>
+            <a:lvl1pPr>
+              <a:defRPr sz="800">
+                <a:solidFill>
+                  <a:srgbClr val="7E7E7E"/>
+                </a:solidFill>
+                <a:latin typeface="Poppins SemiBold"/>
+                <a:ea typeface="Poppins SemiBold"/>
+                <a:cs typeface="Poppins SemiBold"/>
+              </a:defRPr>
+            </a:lvl1pPr>
+          </a:lstStyle>
+          <a:p>
+            <a:pPr algn="l"/>
+            <a:fld id="{F7021451-1387-4CA6-816F-3879F97B5CBC}" type="slidenum">
+              <a:rPr b="0" lang="en-US"/>
+              <a:t>7</a:t>
+            </a:fld>
+            <a:endParaRPr lang="en-US"/>
           </a:p>
         </p:txBody>
       </p:sp>
@@ -8400,13 +8191,6 @@
 <file path=ppt/slides/slide8.xml><?xml version="1.0" encoding="utf-8"?>
 <p:sld xmlns:a="http://schemas.openxmlformats.org/drawingml/2006/main" xmlns:r="http://schemas.openxmlformats.org/officeDocument/2006/relationships" xmlns:p="http://schemas.openxmlformats.org/presentationml/2006/main">
   <p:cSld name="Slide 8">
-    <p:bg>
-      <p:bgPr>
-        <a:solidFill>
-          <a:srgbClr val="1A1A1A"/>
-        </a:solidFill>
-      </p:bgPr>
-    </p:bg>
     <p:spTree>
       <p:nvGrpSpPr>
         <p:cNvPr id="1" name=""/>
@@ -8540,109 +8324,7 @@
       </p:sp>
       <p:sp>
         <p:nvSpPr>
-          <p:cNvPr id="5" name="Text 3"/>
-          <p:cNvSpPr txBox="1"/>
-          <p:nvPr/>
-        </p:nvSpPr>
-        <p:spPr>
-          <a:xfrm>
-            <a:off x="457200" y="4832604"/>
-            <a:ext cx="365760" cy="182880"/>
-          </a:xfrm>
-          <a:prstGeom prst="rect">
-            <a:avLst/>
-          </a:prstGeom>
-          <a:noFill/>
-          <a:ln/>
-        </p:spPr>
-        <p:txBody>
-          <a:bodyPr wrap="square" lIns="0" tIns="0" rIns="0" bIns="0" rtlCol="0" anchor="t"/>
-          <a:lstStyle/>
-          <a:p>
-            <a:pPr indent="0" marL="0">
-              <a:buNone/>
-            </a:pPr>
-            <a:r>
-              <a:rPr lang="en-US" sz="800" dirty="0">
-                <a:solidFill>
-                  <a:srgbClr val="7E7E7E"/>
-                </a:solidFill>
-                <a:latin typeface="Poppins SemiBold" pitchFamily="34" charset="0"/>
-                <a:ea typeface="Poppins SemiBold" pitchFamily="34" charset="-122"/>
-                <a:cs typeface="Poppins SemiBold" pitchFamily="34" charset="-120"/>
-              </a:rPr>
-              <a:t>8</a:t>
-            </a:r>
-            <a:endParaRPr lang="en-US" sz="800" dirty="0"/>
-          </a:p>
-        </p:txBody>
-      </p:sp>
-      <p:sp>
-        <p:nvSpPr>
-          <p:cNvPr id="6" name="Text 4"/>
-          <p:cNvSpPr txBox="1"/>
-          <p:nvPr/>
-        </p:nvSpPr>
-        <p:spPr>
-          <a:xfrm>
-            <a:off x="868680" y="4832604"/>
-            <a:ext cx="5486400" cy="182880"/>
-          </a:xfrm>
-          <a:prstGeom prst="rect">
-            <a:avLst/>
-          </a:prstGeom>
-          <a:noFill/>
-          <a:ln/>
-        </p:spPr>
-        <p:txBody>
-          <a:bodyPr wrap="square" lIns="0" tIns="0" rIns="0" bIns="0" rtlCol="0" anchor="t"/>
-          <a:lstStyle/>
-          <a:p>
-            <a:pPr indent="0" marL="0">
-              <a:buNone/>
-            </a:pPr>
-            <a:r>
-              <a:rPr lang="en-US" sz="700" dirty="0">
-                <a:solidFill>
-                  <a:srgbClr val="7E7E7E"/>
-                </a:solidFill>
-                <a:latin typeface="Poppins" pitchFamily="34" charset="0"/>
-                <a:ea typeface="Poppins" pitchFamily="34" charset="-122"/>
-                <a:cs typeface="Poppins" pitchFamily="34" charset="-120"/>
-              </a:rPr>
-              <a:t>Sabio × PayPal  ·  Proactive point of view for Zenith  ·  Confidential</a:t>
-            </a:r>
-            <a:endParaRPr lang="en-US" sz="700" dirty="0"/>
-          </a:p>
-        </p:txBody>
-      </p:sp>
-      <p:pic>
-        <p:nvPicPr>
-          <p:cNvPr id="7" name="Image 0" descr="/home/claude/benjaminbring-cloud/sabio-deck-builders-/assets/sabio-logo-white-sm.png">    </p:cNvPr>
-          <p:cNvPicPr>
-            <a:picLocks noChangeAspect="1"/>
-          </p:cNvPicPr>
-          <p:nvPr/>
-        </p:nvPicPr>
-        <p:blipFill>
-          <a:blip r:embed="rId1"/>
-          <a:stretch>
-            <a:fillRect/>
-          </a:stretch>
-        </p:blipFill>
-        <p:spPr>
-          <a:xfrm>
-            <a:off x="8028432" y="4805172"/>
-            <a:ext cx="647572" cy="155448"/>
-          </a:xfrm>
-          <a:prstGeom prst="rect">
-            <a:avLst/>
-          </a:prstGeom>
-        </p:spPr>
-      </p:pic>
-      <p:sp>
-        <p:nvSpPr>
-          <p:cNvPr id="8" name="Shape 5"/>
+          <p:cNvPr id="5" name="Shape 3"/>
           <p:cNvSpPr/>
           <p:nvPr/>
         </p:nvSpPr>
@@ -8667,7 +8349,7 @@
       </p:sp>
       <p:sp>
         <p:nvSpPr>
-          <p:cNvPr id="9" name="Text 6"/>
+          <p:cNvPr id="6" name="Text 4"/>
           <p:cNvSpPr txBox="1"/>
           <p:nvPr/>
         </p:nvSpPr>
@@ -8706,7 +8388,7 @@
       </p:sp>
       <p:sp>
         <p:nvSpPr>
-          <p:cNvPr id="10" name="Text 7"/>
+          <p:cNvPr id="7" name="Text 5"/>
           <p:cNvSpPr txBox="1"/>
           <p:nvPr/>
         </p:nvSpPr>
@@ -8745,7 +8427,7 @@
       </p:sp>
       <p:sp>
         <p:nvSpPr>
-          <p:cNvPr id="11" name="Text 8"/>
+          <p:cNvPr id="8" name="Text 6"/>
           <p:cNvSpPr txBox="1"/>
           <p:nvPr/>
         </p:nvSpPr>
@@ -8784,7 +8466,7 @@
       </p:sp>
       <p:sp>
         <p:nvSpPr>
-          <p:cNvPr id="12" name="Shape 9"/>
+          <p:cNvPr id="9" name="Shape 7"/>
           <p:cNvSpPr/>
           <p:nvPr/>
         </p:nvSpPr>
@@ -8809,7 +8491,7 @@
       </p:sp>
       <p:sp>
         <p:nvSpPr>
-          <p:cNvPr id="13" name="Text 10"/>
+          <p:cNvPr id="10" name="Text 8"/>
           <p:cNvSpPr txBox="1"/>
           <p:nvPr/>
         </p:nvSpPr>
@@ -8848,7 +8530,7 @@
       </p:sp>
       <p:sp>
         <p:nvSpPr>
-          <p:cNvPr id="14" name="Text 11"/>
+          <p:cNvPr id="11" name="Text 9"/>
           <p:cNvSpPr txBox="1"/>
           <p:nvPr/>
         </p:nvSpPr>
@@ -8887,7 +8569,7 @@
       </p:sp>
       <p:sp>
         <p:nvSpPr>
-          <p:cNvPr id="15" name="Text 12"/>
+          <p:cNvPr id="12" name="Text 10"/>
           <p:cNvSpPr txBox="1"/>
           <p:nvPr/>
         </p:nvSpPr>
@@ -8926,7 +8608,7 @@
       </p:sp>
       <p:sp>
         <p:nvSpPr>
-          <p:cNvPr id="16" name="Shape 13"/>
+          <p:cNvPr id="13" name="Shape 11"/>
           <p:cNvSpPr/>
           <p:nvPr/>
         </p:nvSpPr>
@@ -8951,7 +8633,7 @@
       </p:sp>
       <p:sp>
         <p:nvSpPr>
-          <p:cNvPr id="17" name="Text 14"/>
+          <p:cNvPr id="14" name="Text 12"/>
           <p:cNvSpPr txBox="1"/>
           <p:nvPr/>
         </p:nvSpPr>
@@ -8990,7 +8672,7 @@
       </p:sp>
       <p:sp>
         <p:nvSpPr>
-          <p:cNvPr id="18" name="Text 15"/>
+          <p:cNvPr id="15" name="Text 13"/>
           <p:cNvSpPr txBox="1"/>
           <p:nvPr/>
         </p:nvSpPr>
@@ -9029,7 +8711,7 @@
       </p:sp>
       <p:sp>
         <p:nvSpPr>
-          <p:cNvPr id="19" name="Text 16"/>
+          <p:cNvPr id="16" name="Text 14"/>
           <p:cNvSpPr txBox="1"/>
           <p:nvPr/>
         </p:nvSpPr>
@@ -9068,7 +8750,7 @@
       </p:sp>
       <p:sp>
         <p:nvSpPr>
-          <p:cNvPr id="20" name="Shape 17"/>
+          <p:cNvPr id="17" name="Shape 15"/>
           <p:cNvSpPr/>
           <p:nvPr/>
         </p:nvSpPr>
@@ -9093,7 +8775,7 @@
       </p:sp>
       <p:sp>
         <p:nvSpPr>
-          <p:cNvPr id="21" name="Text 18"/>
+          <p:cNvPr id="18" name="Text 16"/>
           <p:cNvSpPr txBox="1"/>
           <p:nvPr/>
         </p:nvSpPr>
@@ -9132,7 +8814,7 @@
       </p:sp>
       <p:sp>
         <p:nvSpPr>
-          <p:cNvPr id="22" name="Text 19"/>
+          <p:cNvPr id="19" name="Text 17"/>
           <p:cNvSpPr txBox="1"/>
           <p:nvPr/>
         </p:nvSpPr>
@@ -9227,6 +8909,54 @@
               <a:t>That said, the Venmo card offer is brand new, so we'd want to confirm which product leads before we size anything.</a:t>
             </a:r>
             <a:endParaRPr lang="en-US" sz="950" dirty="0"/>
+          </a:p>
+        </p:txBody>
+      </p:sp>
+      <p:sp>
+        <p:nvSpPr>
+          <p:cNvPr id="25" name="Slide Number Placeholder 0"/>
+          <p:cNvSpPr>
+            <a:spLocks noGrp="1"/>
+          </p:cNvSpPr>
+          <p:nvPr>
+            <p:ph type="sldNum" sz="quarter" idx="4294967295"/>
+          </p:nvPr>
+        </p:nvSpPr>
+        <p:spPr>
+          <a:xfrm>
+            <a:off x="457200" y="4832604"/>
+            <a:ext cx="365760" cy="182880"/>
+          </a:xfrm>
+          <a:prstGeom prst="rect">
+            <a:avLst/>
+          </a:prstGeom>
+          <a:extLst>
+            <a:ext uri="{C572A759-6A51-4108-AA02-DFA0A04FC94B}">
+              <ma14:wrappingTextBoxFlag xmlns:ma14="http://schemas.microsoft.com/office/mac/drawingml/2011/main" val="0"/>
+            </a:ext>
+          </a:extLst>
+        </p:spPr>
+        <p:txBody>
+          <a:bodyPr lIns="0" tIns="0" rIns="0" bIns="0"/>
+          <a:lstStyle>
+            <a:lvl1pPr>
+              <a:defRPr sz="800">
+                <a:solidFill>
+                  <a:srgbClr val="7E7E7E"/>
+                </a:solidFill>
+                <a:latin typeface="Poppins SemiBold"/>
+                <a:ea typeface="Poppins SemiBold"/>
+                <a:cs typeface="Poppins SemiBold"/>
+              </a:defRPr>
+            </a:lvl1pPr>
+          </a:lstStyle>
+          <a:p>
+            <a:pPr algn="l"/>
+            <a:fld id="{F7021451-1387-4CA6-816F-3879F97B5CBC}" type="slidenum">
+              <a:rPr b="0" lang="en-US"/>
+              <a:t>8</a:t>
+            </a:fld>
+            <a:endParaRPr lang="en-US"/>
           </a:p>
         </p:txBody>
       </p:sp>
@@ -9241,13 +8971,6 @@
 <file path=ppt/slides/slide9.xml><?xml version="1.0" encoding="utf-8"?>
 <p:sld xmlns:a="http://schemas.openxmlformats.org/drawingml/2006/main" xmlns:r="http://schemas.openxmlformats.org/officeDocument/2006/relationships" xmlns:p="http://schemas.openxmlformats.org/presentationml/2006/main">
   <p:cSld name="Slide 9">
-    <p:bg>
-      <p:bgPr>
-        <a:solidFill>
-          <a:srgbClr val="1A1A1A"/>
-        </a:solidFill>
-      </p:bgPr>
-    </p:bg>
     <p:spTree>
       <p:nvGrpSpPr>
         <p:cNvPr id="1" name=""/>
@@ -9342,109 +9065,7 @@
       </p:sp>
       <p:sp>
         <p:nvSpPr>
-          <p:cNvPr id="4" name="Text 2"/>
-          <p:cNvSpPr txBox="1"/>
-          <p:nvPr/>
-        </p:nvSpPr>
-        <p:spPr>
-          <a:xfrm>
-            <a:off x="457200" y="4832604"/>
-            <a:ext cx="365760" cy="182880"/>
-          </a:xfrm>
-          <a:prstGeom prst="rect">
-            <a:avLst/>
-          </a:prstGeom>
-          <a:noFill/>
-          <a:ln/>
-        </p:spPr>
-        <p:txBody>
-          <a:bodyPr wrap="square" lIns="0" tIns="0" rIns="0" bIns="0" rtlCol="0" anchor="t"/>
-          <a:lstStyle/>
-          <a:p>
-            <a:pPr indent="0" marL="0">
-              <a:buNone/>
-            </a:pPr>
-            <a:r>
-              <a:rPr lang="en-US" sz="800" dirty="0">
-                <a:solidFill>
-                  <a:srgbClr val="7E7E7E"/>
-                </a:solidFill>
-                <a:latin typeface="Poppins SemiBold" pitchFamily="34" charset="0"/>
-                <a:ea typeface="Poppins SemiBold" pitchFamily="34" charset="-122"/>
-                <a:cs typeface="Poppins SemiBold" pitchFamily="34" charset="-120"/>
-              </a:rPr>
-              <a:t>9</a:t>
-            </a:r>
-            <a:endParaRPr lang="en-US" sz="800" dirty="0"/>
-          </a:p>
-        </p:txBody>
-      </p:sp>
-      <p:sp>
-        <p:nvSpPr>
-          <p:cNvPr id="5" name="Text 3"/>
-          <p:cNvSpPr txBox="1"/>
-          <p:nvPr/>
-        </p:nvSpPr>
-        <p:spPr>
-          <a:xfrm>
-            <a:off x="868680" y="4832604"/>
-            <a:ext cx="5486400" cy="182880"/>
-          </a:xfrm>
-          <a:prstGeom prst="rect">
-            <a:avLst/>
-          </a:prstGeom>
-          <a:noFill/>
-          <a:ln/>
-        </p:spPr>
-        <p:txBody>
-          <a:bodyPr wrap="square" lIns="0" tIns="0" rIns="0" bIns="0" rtlCol="0" anchor="t"/>
-          <a:lstStyle/>
-          <a:p>
-            <a:pPr indent="0" marL="0">
-              <a:buNone/>
-            </a:pPr>
-            <a:r>
-              <a:rPr lang="en-US" sz="700" dirty="0">
-                <a:solidFill>
-                  <a:srgbClr val="7E7E7E"/>
-                </a:solidFill>
-                <a:latin typeface="Poppins" pitchFamily="34" charset="0"/>
-                <a:ea typeface="Poppins" pitchFamily="34" charset="-122"/>
-                <a:cs typeface="Poppins" pitchFamily="34" charset="-120"/>
-              </a:rPr>
-              <a:t>Sabio × PayPal  ·  Proactive point of view for Zenith  ·  Confidential</a:t>
-            </a:r>
-            <a:endParaRPr lang="en-US" sz="700" dirty="0"/>
-          </a:p>
-        </p:txBody>
-      </p:sp>
-      <p:pic>
-        <p:nvPicPr>
-          <p:cNvPr id="6" name="Image 0" descr="/home/claude/benjaminbring-cloud/sabio-deck-builders-/assets/sabio-logo-white-sm.png">    </p:cNvPr>
-          <p:cNvPicPr>
-            <a:picLocks noChangeAspect="1"/>
-          </p:cNvPicPr>
-          <p:nvPr/>
-        </p:nvPicPr>
-        <p:blipFill>
-          <a:blip r:embed="rId1"/>
-          <a:stretch>
-            <a:fillRect/>
-          </a:stretch>
-        </p:blipFill>
-        <p:spPr>
-          <a:xfrm>
-            <a:off x="8028432" y="4805172"/>
-            <a:ext cx="647572" cy="155448"/>
-          </a:xfrm>
-          <a:prstGeom prst="rect">
-            <a:avLst/>
-          </a:prstGeom>
-        </p:spPr>
-      </p:pic>
-      <p:sp>
-        <p:nvSpPr>
-          <p:cNvPr id="7" name="Shape 4"/>
+          <p:cNvPr id="4" name="Shape 2"/>
           <p:cNvSpPr/>
           <p:nvPr/>
         </p:nvSpPr>
@@ -9469,7 +9090,7 @@
       </p:sp>
       <p:sp>
         <p:nvSpPr>
-          <p:cNvPr id="8" name="Text 5"/>
+          <p:cNvPr id="5" name="Text 3"/>
           <p:cNvSpPr txBox="1"/>
           <p:nvPr/>
         </p:nvSpPr>
@@ -9508,7 +9129,7 @@
       </p:sp>
       <p:sp>
         <p:nvSpPr>
-          <p:cNvPr id="9" name="Text 6"/>
+          <p:cNvPr id="6" name="Text 4"/>
           <p:cNvSpPr txBox="1"/>
           <p:nvPr/>
         </p:nvSpPr>
@@ -9547,7 +9168,7 @@
       </p:sp>
       <p:sp>
         <p:nvSpPr>
-          <p:cNvPr id="10" name="Text 7"/>
+          <p:cNvPr id="7" name="Text 5"/>
           <p:cNvSpPr txBox="1"/>
           <p:nvPr/>
         </p:nvSpPr>
@@ -9586,7 +9207,7 @@
       </p:sp>
       <p:sp>
         <p:nvSpPr>
-          <p:cNvPr id="11" name="Shape 8"/>
+          <p:cNvPr id="8" name="Shape 6"/>
           <p:cNvSpPr/>
           <p:nvPr/>
         </p:nvSpPr>
@@ -9611,7 +9232,7 @@
       </p:sp>
       <p:sp>
         <p:nvSpPr>
-          <p:cNvPr id="12" name="Text 9"/>
+          <p:cNvPr id="9" name="Text 7"/>
           <p:cNvSpPr txBox="1"/>
           <p:nvPr/>
         </p:nvSpPr>
@@ -9650,7 +9271,7 @@
       </p:sp>
       <p:sp>
         <p:nvSpPr>
-          <p:cNvPr id="13" name="Shape 10"/>
+          <p:cNvPr id="10" name="Shape 8"/>
           <p:cNvSpPr/>
           <p:nvPr/>
         </p:nvSpPr>
@@ -9675,7 +9296,7 @@
       </p:sp>
       <p:sp>
         <p:nvSpPr>
-          <p:cNvPr id="14" name="Text 11"/>
+          <p:cNvPr id="11" name="Text 9"/>
           <p:cNvSpPr txBox="1"/>
           <p:nvPr/>
         </p:nvSpPr>
@@ -9714,7 +9335,7 @@
       </p:sp>
       <p:sp>
         <p:nvSpPr>
-          <p:cNvPr id="15" name="Text 12"/>
+          <p:cNvPr id="12" name="Text 10"/>
           <p:cNvSpPr txBox="1"/>
           <p:nvPr/>
         </p:nvSpPr>
@@ -9753,7 +9374,7 @@
       </p:sp>
       <p:sp>
         <p:nvSpPr>
-          <p:cNvPr id="16" name="Text 13"/>
+          <p:cNvPr id="13" name="Text 11"/>
           <p:cNvSpPr txBox="1"/>
           <p:nvPr/>
         </p:nvSpPr>
@@ -9792,7 +9413,7 @@
       </p:sp>
       <p:sp>
         <p:nvSpPr>
-          <p:cNvPr id="17" name="Shape 14"/>
+          <p:cNvPr id="14" name="Shape 12"/>
           <p:cNvSpPr/>
           <p:nvPr/>
         </p:nvSpPr>
@@ -9817,7 +9438,7 @@
       </p:sp>
       <p:sp>
         <p:nvSpPr>
-          <p:cNvPr id="18" name="Text 15"/>
+          <p:cNvPr id="15" name="Text 13"/>
           <p:cNvSpPr txBox="1"/>
           <p:nvPr/>
         </p:nvSpPr>
@@ -9856,7 +9477,7 @@
       </p:sp>
       <p:sp>
         <p:nvSpPr>
-          <p:cNvPr id="19" name="Shape 16"/>
+          <p:cNvPr id="16" name="Shape 14"/>
           <p:cNvSpPr/>
           <p:nvPr/>
         </p:nvSpPr>
@@ -9881,7 +9502,7 @@
       </p:sp>
       <p:sp>
         <p:nvSpPr>
-          <p:cNvPr id="20" name="Text 17"/>
+          <p:cNvPr id="17" name="Text 15"/>
           <p:cNvSpPr txBox="1"/>
           <p:nvPr/>
         </p:nvSpPr>
@@ -9920,7 +9541,7 @@
       </p:sp>
       <p:sp>
         <p:nvSpPr>
-          <p:cNvPr id="21" name="Text 18"/>
+          <p:cNvPr id="18" name="Text 16"/>
           <p:cNvSpPr txBox="1"/>
           <p:nvPr/>
         </p:nvSpPr>
@@ -9959,7 +9580,7 @@
       </p:sp>
       <p:sp>
         <p:nvSpPr>
-          <p:cNvPr id="22" name="Text 19"/>
+          <p:cNvPr id="19" name="Text 17"/>
           <p:cNvSpPr txBox="1"/>
           <p:nvPr/>
         </p:nvSpPr>
@@ -9998,7 +9619,7 @@
       </p:sp>
       <p:sp>
         <p:nvSpPr>
-          <p:cNvPr id="23" name="Shape 20"/>
+          <p:cNvPr id="20" name="Shape 18"/>
           <p:cNvSpPr/>
           <p:nvPr/>
         </p:nvSpPr>
@@ -10023,7 +9644,7 @@
       </p:sp>
       <p:sp>
         <p:nvSpPr>
-          <p:cNvPr id="24" name="Text 21"/>
+          <p:cNvPr id="21" name="Text 19"/>
           <p:cNvSpPr txBox="1"/>
           <p:nvPr/>
         </p:nvSpPr>
@@ -10062,7 +9683,7 @@
       </p:sp>
       <p:sp>
         <p:nvSpPr>
-          <p:cNvPr id="25" name="Text 22"/>
+          <p:cNvPr id="22" name="Text 20"/>
           <p:cNvSpPr txBox="1"/>
           <p:nvPr/>
         </p:nvSpPr>
@@ -10096,6 +9717,54 @@
               <a:t>Happy to walk the team through it this week. Please LMK what else would help.</a:t>
             </a:r>
             <a:endParaRPr lang="en-US" sz="950" dirty="0"/>
+          </a:p>
+        </p:txBody>
+      </p:sp>
+      <p:sp>
+        <p:nvSpPr>
+          <p:cNvPr id="25" name="Slide Number Placeholder 0"/>
+          <p:cNvSpPr>
+            <a:spLocks noGrp="1"/>
+          </p:cNvSpPr>
+          <p:nvPr>
+            <p:ph type="sldNum" sz="quarter" idx="4294967295"/>
+          </p:nvPr>
+        </p:nvSpPr>
+        <p:spPr>
+          <a:xfrm>
+            <a:off x="457200" y="4832604"/>
+            <a:ext cx="365760" cy="182880"/>
+          </a:xfrm>
+          <a:prstGeom prst="rect">
+            <a:avLst/>
+          </a:prstGeom>
+          <a:extLst>
+            <a:ext uri="{C572A759-6A51-4108-AA02-DFA0A04FC94B}">
+              <ma14:wrappingTextBoxFlag xmlns:ma14="http://schemas.microsoft.com/office/mac/drawingml/2011/main" val="0"/>
+            </a:ext>
+          </a:extLst>
+        </p:spPr>
+        <p:txBody>
+          <a:bodyPr lIns="0" tIns="0" rIns="0" bIns="0"/>
+          <a:lstStyle>
+            <a:lvl1pPr>
+              <a:defRPr sz="800">
+                <a:solidFill>
+                  <a:srgbClr val="7E7E7E"/>
+                </a:solidFill>
+                <a:latin typeface="Poppins SemiBold"/>
+                <a:ea typeface="Poppins SemiBold"/>
+                <a:cs typeface="Poppins SemiBold"/>
+              </a:defRPr>
+            </a:lvl1pPr>
+          </a:lstStyle>
+          <a:p>
+            <a:pPr algn="l"/>
+            <a:fld id="{F7021451-1387-4CA6-816F-3879F97B5CBC}" type="slidenum">
+              <a:rPr b="0" lang="en-US"/>
+              <a:t>9</a:t>
+            </a:fld>
+            <a:endParaRPr lang="en-US"/>
           </a:p>
         </p:txBody>
       </p:sp>
